--- a/system/Presentation.pptx
+++ b/system/Presentation.pptx
@@ -2,7 +2,7 @@
 <file path=ppt/presentation.xml><?xml version="1.0" encoding="utf-8"?>
 <p:presentation xmlns:a="http://schemas.openxmlformats.org/drawingml/2006/main" xmlns:r="http://schemas.openxmlformats.org/officeDocument/2006/relationships" xmlns:p="http://schemas.openxmlformats.org/presentationml/2006/main" saveSubsetFonts="1">
   <p:sldMasterIdLst>
-    <p:sldMasterId id="2147483717" r:id="rId1"/>
+    <p:sldMasterId id="2147483736" r:id="rId1"/>
   </p:sldMasterIdLst>
   <p:sldIdLst>
     <p:sldId id="256" r:id="rId2"/>
@@ -108,6 +108,11 @@
       </a:defRPr>
     </a:lvl9pPr>
   </p:defaultTextStyle>
+  <p:extLst>
+    <p:ext uri="{EFAFB233-063F-42B5-8137-9DF3F51BA10A}">
+      <p15:sldGuideLst xmlns:p15="http://schemas.microsoft.com/office/powerpoint/2012/main"/>
+    </p:ext>
+  </p:extLst>
 </p:presentation>
 </file>
 
@@ -265,10 +270,10 @@
           <a:gradFill flip="none" rotWithShape="1">
             <a:gsLst>
               <a:gs pos="34000">
-                <a:schemeClr val="accent1"/>
+                <a:schemeClr val="accent2"/>
               </a:gs>
               <a:gs pos="100000">
-                <a:schemeClr val="accent1">
+                <a:schemeClr val="accent2">
                   <a:lumMod val="50000"/>
                 </a:schemeClr>
               </a:gs>
@@ -335,10 +340,10 @@
           <a:gradFill flip="none" rotWithShape="1">
             <a:gsLst>
               <a:gs pos="34000">
-                <a:schemeClr val="accent1"/>
+                <a:schemeClr val="accent2"/>
               </a:gs>
               <a:gs pos="100000">
-                <a:schemeClr val="accent1">
+                <a:schemeClr val="accent2">
                   <a:lumMod val="50000"/>
                 </a:schemeClr>
               </a:gs>
@@ -554,7 +559,7 @@
             <a:lvl1pPr algn="ctr">
               <a:defRPr sz="5400">
                 <a:solidFill>
-                  <a:schemeClr val="accent1">
+                  <a:schemeClr val="accent2">
                     <a:lumMod val="50000"/>
                   </a:schemeClr>
                 </a:solidFill>
@@ -564,7 +569,7 @@
           <a:p>
             <a:fld id="{E80C50CD-E178-4744-9B35-B2F624D6C5E9}" type="datetimeFigureOut">
               <a:rPr lang="en-US" smtClean="0"/>
-              <a:t>3/23/2026</a:t>
+              <a:t>3/30/2026</a:t>
             </a:fld>
             <a:endParaRPr lang="en-US"/>
           </a:p>
@@ -582,8 +587,8 @@
         </p:nvSpPr>
         <p:spPr>
           <a:xfrm rot="21420000">
-            <a:off x="-5560" y="4883024"/>
-            <a:ext cx="4047239" cy="1195538"/>
+            <a:off x="-9144" y="4882896"/>
+            <a:ext cx="4050792" cy="1197864"/>
           </a:xfrm>
         </p:spPr>
         <p:txBody>
@@ -682,7 +687,7 @@
     </p:spTree>
     <p:extLst>
       <p:ext uri="{BB962C8B-B14F-4D97-AF65-F5344CB8AC3E}">
-        <p14:creationId xmlns:p14="http://schemas.microsoft.com/office/powerpoint/2010/main" val="1199326873"/>
+        <p14:creationId xmlns:p14="http://schemas.microsoft.com/office/powerpoint/2010/main" val="815336360"/>
       </p:ext>
     </p:extLst>
   </p:cSld>
@@ -897,7 +902,7 @@
             <a:fld id="{E80C50CD-E178-4744-9B35-B2F624D6C5E9}" type="datetimeFigureOut">
               <a:rPr lang="en-US" smtClean="0"/>
               <a:pPr/>
-              <a:t>3/23/2026</a:t>
+              <a:t>3/30/2026</a:t>
             </a:fld>
             <a:endParaRPr lang="en-US"/>
           </a:p>
@@ -949,7 +954,7 @@
     </p:spTree>
     <p:extLst>
       <p:ext uri="{BB962C8B-B14F-4D97-AF65-F5344CB8AC3E}">
-        <p14:creationId xmlns:p14="http://schemas.microsoft.com/office/powerpoint/2010/main" val="4144135776"/>
+        <p14:creationId xmlns:p14="http://schemas.microsoft.com/office/powerpoint/2010/main" val="895121313"/>
       </p:ext>
     </p:extLst>
   </p:cSld>
@@ -1095,7 +1100,7 @@
             <a:fld id="{E80C50CD-E178-4744-9B35-B2F624D6C5E9}" type="datetimeFigureOut">
               <a:rPr lang="en-US" smtClean="0"/>
               <a:pPr/>
-              <a:t>3/23/2026</a:t>
+              <a:t>3/30/2026</a:t>
             </a:fld>
             <a:endParaRPr lang="en-US"/>
           </a:p>
@@ -1147,7 +1152,7 @@
     </p:spTree>
     <p:extLst>
       <p:ext uri="{BB962C8B-B14F-4D97-AF65-F5344CB8AC3E}">
-        <p14:creationId xmlns:p14="http://schemas.microsoft.com/office/powerpoint/2010/main" val="3309488973"/>
+        <p14:creationId xmlns:p14="http://schemas.microsoft.com/office/powerpoint/2010/main" val="1897905394"/>
       </p:ext>
     </p:extLst>
   </p:cSld>
@@ -1367,7 +1372,7 @@
             <a:fld id="{E80C50CD-E178-4744-9B35-B2F624D6C5E9}" type="datetimeFigureOut">
               <a:rPr lang="en-US" smtClean="0"/>
               <a:pPr/>
-              <a:t>3/23/2026</a:t>
+              <a:t>3/30/2026</a:t>
             </a:fld>
             <a:endParaRPr lang="en-US"/>
           </a:p>
@@ -1651,7 +1656,7 @@
     </p:spTree>
     <p:extLst>
       <p:ext uri="{BB962C8B-B14F-4D97-AF65-F5344CB8AC3E}">
-        <p14:creationId xmlns:p14="http://schemas.microsoft.com/office/powerpoint/2010/main" val="1021378967"/>
+        <p14:creationId xmlns:p14="http://schemas.microsoft.com/office/powerpoint/2010/main" val="2422783463"/>
       </p:ext>
     </p:extLst>
   </p:cSld>
@@ -1797,7 +1802,7 @@
             <a:fld id="{E80C50CD-E178-4744-9B35-B2F624D6C5E9}" type="datetimeFigureOut">
               <a:rPr lang="en-US" smtClean="0"/>
               <a:pPr/>
-              <a:t>3/23/2026</a:t>
+              <a:t>3/30/2026</a:t>
             </a:fld>
             <a:endParaRPr lang="en-US"/>
           </a:p>
@@ -1849,7 +1854,7 @@
     </p:spTree>
     <p:extLst>
       <p:ext uri="{BB962C8B-B14F-4D97-AF65-F5344CB8AC3E}">
-        <p14:creationId xmlns:p14="http://schemas.microsoft.com/office/powerpoint/2010/main" val="203758466"/>
+        <p14:creationId xmlns:p14="http://schemas.microsoft.com/office/powerpoint/2010/main" val="2085274638"/>
       </p:ext>
     </p:extLst>
   </p:cSld>
@@ -2349,7 +2354,7 @@
             <a:fld id="{E80C50CD-E178-4744-9B35-B2F624D6C5E9}" type="datetimeFigureOut">
               <a:rPr lang="en-US" smtClean="0"/>
               <a:pPr/>
-              <a:t>3/23/2026</a:t>
+              <a:t>3/30/2026</a:t>
             </a:fld>
             <a:endParaRPr lang="en-US"/>
           </a:p>
@@ -2401,7 +2406,7 @@
     </p:spTree>
     <p:extLst>
       <p:ext uri="{BB962C8B-B14F-4D97-AF65-F5344CB8AC3E}">
-        <p14:creationId xmlns:p14="http://schemas.microsoft.com/office/powerpoint/2010/main" val="595646521"/>
+        <p14:creationId xmlns:p14="http://schemas.microsoft.com/office/powerpoint/2010/main" val="3862890830"/>
       </p:ext>
     </p:extLst>
   </p:cSld>
@@ -3141,7 +3146,7 @@
             <a:fld id="{E80C50CD-E178-4744-9B35-B2F624D6C5E9}" type="datetimeFigureOut">
               <a:rPr lang="en-US" smtClean="0"/>
               <a:pPr/>
-              <a:t>3/23/2026</a:t>
+              <a:t>3/30/2026</a:t>
             </a:fld>
             <a:endParaRPr lang="en-US"/>
           </a:p>
@@ -3193,7 +3198,7 @@
     </p:spTree>
     <p:extLst>
       <p:ext uri="{BB962C8B-B14F-4D97-AF65-F5344CB8AC3E}">
-        <p14:creationId xmlns:p14="http://schemas.microsoft.com/office/powerpoint/2010/main" val="1592166080"/>
+        <p14:creationId xmlns:p14="http://schemas.microsoft.com/office/powerpoint/2010/main" val="1847169482"/>
       </p:ext>
     </p:extLst>
   </p:cSld>
@@ -3322,7 +3327,7 @@
             <a:fld id="{E80C50CD-E178-4744-9B35-B2F624D6C5E9}" type="datetimeFigureOut">
               <a:rPr lang="en-US" smtClean="0"/>
               <a:pPr/>
-              <a:t>3/23/2026</a:t>
+              <a:t>3/30/2026</a:t>
             </a:fld>
             <a:endParaRPr lang="en-US"/>
           </a:p>
@@ -3374,7 +3379,7 @@
     </p:spTree>
     <p:extLst>
       <p:ext uri="{BB962C8B-B14F-4D97-AF65-F5344CB8AC3E}">
-        <p14:creationId xmlns:p14="http://schemas.microsoft.com/office/powerpoint/2010/main" val="583454335"/>
+        <p14:creationId xmlns:p14="http://schemas.microsoft.com/office/powerpoint/2010/main" val="2640915661"/>
       </p:ext>
     </p:extLst>
   </p:cSld>
@@ -3508,7 +3513,7 @@
             <a:fld id="{E80C50CD-E178-4744-9B35-B2F624D6C5E9}" type="datetimeFigureOut">
               <a:rPr lang="en-US" smtClean="0"/>
               <a:pPr/>
-              <a:t>3/23/2026</a:t>
+              <a:t>3/30/2026</a:t>
             </a:fld>
             <a:endParaRPr lang="en-US"/>
           </a:p>
@@ -3560,7 +3565,7 @@
     </p:spTree>
     <p:extLst>
       <p:ext uri="{BB962C8B-B14F-4D97-AF65-F5344CB8AC3E}">
-        <p14:creationId xmlns:p14="http://schemas.microsoft.com/office/powerpoint/2010/main" val="2383018479"/>
+        <p14:creationId xmlns:p14="http://schemas.microsoft.com/office/powerpoint/2010/main" val="677689227"/>
       </p:ext>
     </p:extLst>
   </p:cSld>
@@ -3685,7 +3690,7 @@
           <a:p>
             <a:fld id="{E80C50CD-E178-4744-9B35-B2F624D6C5E9}" type="datetimeFigureOut">
               <a:rPr lang="en-US" smtClean="0"/>
-              <a:t>3/23/2026</a:t>
+              <a:t>3/30/2026</a:t>
             </a:fld>
             <a:endParaRPr lang="en-US"/>
           </a:p>
@@ -3736,7 +3741,7 @@
     </p:spTree>
     <p:extLst>
       <p:ext uri="{BB962C8B-B14F-4D97-AF65-F5344CB8AC3E}">
-        <p14:creationId xmlns:p14="http://schemas.microsoft.com/office/powerpoint/2010/main" val="3864188570"/>
+        <p14:creationId xmlns:p14="http://schemas.microsoft.com/office/powerpoint/2010/main" val="4190802211"/>
       </p:ext>
     </p:extLst>
   </p:cSld>
@@ -3861,7 +3866,7 @@
             <a:fld id="{E80C50CD-E178-4744-9B35-B2F624D6C5E9}" type="datetimeFigureOut">
               <a:rPr lang="en-US" smtClean="0"/>
               <a:pPr/>
-              <a:t>3/23/2026</a:t>
+              <a:t>3/30/2026</a:t>
             </a:fld>
             <a:endParaRPr lang="en-US"/>
           </a:p>
@@ -3913,7 +3918,7 @@
     </p:spTree>
     <p:extLst>
       <p:ext uri="{BB962C8B-B14F-4D97-AF65-F5344CB8AC3E}">
-        <p14:creationId xmlns:p14="http://schemas.microsoft.com/office/powerpoint/2010/main" val="1073655602"/>
+        <p14:creationId xmlns:p14="http://schemas.microsoft.com/office/powerpoint/2010/main" val="2151824816"/>
       </p:ext>
     </p:extLst>
   </p:cSld>
@@ -4112,7 +4117,7 @@
           <a:p>
             <a:fld id="{E80C50CD-E178-4744-9B35-B2F624D6C5E9}" type="datetimeFigureOut">
               <a:rPr lang="en-US" smtClean="0"/>
-              <a:t>3/23/2026</a:t>
+              <a:t>3/30/2026</a:t>
             </a:fld>
             <a:endParaRPr lang="en-US"/>
           </a:p>
@@ -4163,7 +4168,7 @@
     </p:spTree>
     <p:extLst>
       <p:ext uri="{BB962C8B-B14F-4D97-AF65-F5344CB8AC3E}">
-        <p14:creationId xmlns:p14="http://schemas.microsoft.com/office/powerpoint/2010/main" val="3311265840"/>
+        <p14:creationId xmlns:p14="http://schemas.microsoft.com/office/powerpoint/2010/main" val="2299247952"/>
       </p:ext>
     </p:extLst>
   </p:cSld>
@@ -4350,7 +4355,7 @@
             <a:fld id="{E80C50CD-E178-4744-9B35-B2F624D6C5E9}" type="datetimeFigureOut">
               <a:rPr lang="en-US" smtClean="0"/>
               <a:pPr/>
-              <a:t>3/23/2026</a:t>
+              <a:t>3/30/2026</a:t>
             </a:fld>
             <a:endParaRPr lang="en-US"/>
           </a:p>
@@ -4402,7 +4407,7 @@
     </p:spTree>
     <p:extLst>
       <p:ext uri="{BB962C8B-B14F-4D97-AF65-F5344CB8AC3E}">
-        <p14:creationId xmlns:p14="http://schemas.microsoft.com/office/powerpoint/2010/main" val="4275378220"/>
+        <p14:creationId xmlns:p14="http://schemas.microsoft.com/office/powerpoint/2010/main" val="1422879424"/>
       </p:ext>
     </p:extLst>
   </p:cSld>
@@ -4737,7 +4742,7 @@
             <a:fld id="{E80C50CD-E178-4744-9B35-B2F624D6C5E9}" type="datetimeFigureOut">
               <a:rPr lang="en-US" smtClean="0"/>
               <a:pPr/>
-              <a:t>3/23/2026</a:t>
+              <a:t>3/30/2026</a:t>
             </a:fld>
             <a:endParaRPr lang="en-US"/>
           </a:p>
@@ -4789,7 +4794,7 @@
     </p:spTree>
     <p:extLst>
       <p:ext uri="{BB962C8B-B14F-4D97-AF65-F5344CB8AC3E}">
-        <p14:creationId xmlns:p14="http://schemas.microsoft.com/office/powerpoint/2010/main" val="1926704335"/>
+        <p14:creationId xmlns:p14="http://schemas.microsoft.com/office/powerpoint/2010/main" val="3711188369"/>
       </p:ext>
     </p:extLst>
   </p:cSld>
@@ -4856,7 +4861,7 @@
           <a:p>
             <a:fld id="{E80C50CD-E178-4744-9B35-B2F624D6C5E9}" type="datetimeFigureOut">
               <a:rPr lang="en-US" smtClean="0"/>
-              <a:t>3/23/2026</a:t>
+              <a:t>3/30/2026</a:t>
             </a:fld>
             <a:endParaRPr lang="en-US"/>
           </a:p>
@@ -4907,7 +4912,7 @@
     </p:spTree>
     <p:extLst>
       <p:ext uri="{BB962C8B-B14F-4D97-AF65-F5344CB8AC3E}">
-        <p14:creationId xmlns:p14="http://schemas.microsoft.com/office/powerpoint/2010/main" val="894838341"/>
+        <p14:creationId xmlns:p14="http://schemas.microsoft.com/office/powerpoint/2010/main" val="1911347454"/>
       </p:ext>
     </p:extLst>
   </p:cSld>
@@ -4951,7 +4956,7 @@
           <a:p>
             <a:fld id="{E80C50CD-E178-4744-9B35-B2F624D6C5E9}" type="datetimeFigureOut">
               <a:rPr lang="en-US" smtClean="0"/>
-              <a:t>3/23/2026</a:t>
+              <a:t>3/30/2026</a:t>
             </a:fld>
             <a:endParaRPr lang="en-US"/>
           </a:p>
@@ -5002,7 +5007,7 @@
     </p:spTree>
     <p:extLst>
       <p:ext uri="{BB962C8B-B14F-4D97-AF65-F5344CB8AC3E}">
-        <p14:creationId xmlns:p14="http://schemas.microsoft.com/office/powerpoint/2010/main" val="3052295301"/>
+        <p14:creationId xmlns:p14="http://schemas.microsoft.com/office/powerpoint/2010/main" val="1439923392"/>
       </p:ext>
     </p:extLst>
   </p:cSld>
@@ -5205,7 +5210,7 @@
             <a:fld id="{E80C50CD-E178-4744-9B35-B2F624D6C5E9}" type="datetimeFigureOut">
               <a:rPr lang="en-US" smtClean="0"/>
               <a:pPr/>
-              <a:t>3/23/2026</a:t>
+              <a:t>3/30/2026</a:t>
             </a:fld>
             <a:endParaRPr lang="en-US"/>
           </a:p>
@@ -5257,7 +5262,7 @@
     </p:spTree>
     <p:extLst>
       <p:ext uri="{BB962C8B-B14F-4D97-AF65-F5344CB8AC3E}">
-        <p14:creationId xmlns:p14="http://schemas.microsoft.com/office/powerpoint/2010/main" val="2104403719"/>
+        <p14:creationId xmlns:p14="http://schemas.microsoft.com/office/powerpoint/2010/main" val="2880417417"/>
       </p:ext>
     </p:extLst>
   </p:cSld>
@@ -5475,7 +5480,7 @@
           <a:p>
             <a:fld id="{E80C50CD-E178-4744-9B35-B2F624D6C5E9}" type="datetimeFigureOut">
               <a:rPr lang="en-US" smtClean="0"/>
-              <a:t>3/23/2026</a:t>
+              <a:t>3/30/2026</a:t>
             </a:fld>
             <a:endParaRPr lang="en-US"/>
           </a:p>
@@ -5526,7 +5531,7 @@
     </p:spTree>
     <p:extLst>
       <p:ext uri="{BB962C8B-B14F-4D97-AF65-F5344CB8AC3E}">
-        <p14:creationId xmlns:p14="http://schemas.microsoft.com/office/powerpoint/2010/main" val="1571440587"/>
+        <p14:creationId xmlns:p14="http://schemas.microsoft.com/office/powerpoint/2010/main" val="1176384624"/>
       </p:ext>
     </p:extLst>
   </p:cSld>
@@ -5715,10 +5720,10 @@
             <a:gradFill flip="none" rotWithShape="1">
               <a:gsLst>
                 <a:gs pos="34000">
-                  <a:schemeClr val="accent1"/>
+                  <a:schemeClr val="accent2"/>
                 </a:gs>
                 <a:gs pos="100000">
-                  <a:schemeClr val="accent1">
+                  <a:schemeClr val="accent2">
                     <a:lumMod val="50000"/>
                   </a:schemeClr>
                 </a:gs>
@@ -5868,7 +5873,7 @@
             <a:lvl1pPr algn="r">
               <a:defRPr sz="3200" cap="all" baseline="0">
                 <a:solidFill>
-                  <a:schemeClr val="accent1">
+                  <a:schemeClr val="accent2">
                     <a:lumMod val="50000"/>
                   </a:schemeClr>
                 </a:solidFill>
@@ -5879,7 +5884,7 @@
             <a:fld id="{E80C50CD-E178-4744-9B35-B2F624D6C5E9}" type="datetimeFigureOut">
               <a:rPr lang="en-US" smtClean="0"/>
               <a:pPr/>
-              <a:t>3/23/2026</a:t>
+              <a:t>3/30/2026</a:t>
             </a:fld>
             <a:endParaRPr lang="en-US"/>
           </a:p>
@@ -5910,7 +5915,7 @@
             <a:lvl1pPr algn="l">
               <a:defRPr sz="3200" cap="all" baseline="0">
                 <a:solidFill>
-                  <a:schemeClr val="accent1">
+                  <a:schemeClr val="accent2">
                     <a:lumMod val="50000"/>
                   </a:schemeClr>
                 </a:solidFill>
@@ -5947,7 +5952,7 @@
             <a:lvl1pPr algn="ctr">
               <a:defRPr sz="3200" cap="all" baseline="0">
                 <a:solidFill>
-                  <a:schemeClr val="accent1">
+                  <a:schemeClr val="accent2">
                     <a:lumMod val="50000"/>
                   </a:schemeClr>
                 </a:solidFill>
@@ -5967,30 +5972,30 @@
     </p:spTree>
     <p:extLst>
       <p:ext uri="{BB962C8B-B14F-4D97-AF65-F5344CB8AC3E}">
-        <p14:creationId xmlns:p14="http://schemas.microsoft.com/office/powerpoint/2010/main" val="2166005944"/>
+        <p14:creationId xmlns:p14="http://schemas.microsoft.com/office/powerpoint/2010/main" val="613644880"/>
       </p:ext>
     </p:extLst>
   </p:cSld>
   <p:clrMap bg1="lt1" tx1="dk1" bg2="lt2" tx2="dk2" accent1="accent1" accent2="accent2" accent3="accent3" accent4="accent4" accent5="accent5" accent6="accent6" hlink="hlink" folHlink="folHlink"/>
   <p:sldLayoutIdLst>
-    <p:sldLayoutId id="2147483718" r:id="rId1"/>
-    <p:sldLayoutId id="2147483719" r:id="rId2"/>
-    <p:sldLayoutId id="2147483720" r:id="rId3"/>
-    <p:sldLayoutId id="2147483721" r:id="rId4"/>
-    <p:sldLayoutId id="2147483722" r:id="rId5"/>
-    <p:sldLayoutId id="2147483723" r:id="rId6"/>
-    <p:sldLayoutId id="2147483724" r:id="rId7"/>
-    <p:sldLayoutId id="2147483725" r:id="rId8"/>
-    <p:sldLayoutId id="2147483726" r:id="rId9"/>
-    <p:sldLayoutId id="2147483727" r:id="rId10"/>
-    <p:sldLayoutId id="2147483728" r:id="rId11"/>
-    <p:sldLayoutId id="2147483729" r:id="rId12"/>
-    <p:sldLayoutId id="2147483730" r:id="rId13"/>
-    <p:sldLayoutId id="2147483731" r:id="rId14"/>
-    <p:sldLayoutId id="2147483732" r:id="rId15"/>
-    <p:sldLayoutId id="2147483733" r:id="rId16"/>
-    <p:sldLayoutId id="2147483734" r:id="rId17"/>
-    <p:sldLayoutId id="2147483735" r:id="rId18"/>
+    <p:sldLayoutId id="2147483737" r:id="rId1"/>
+    <p:sldLayoutId id="2147483738" r:id="rId2"/>
+    <p:sldLayoutId id="2147483739" r:id="rId3"/>
+    <p:sldLayoutId id="2147483740" r:id="rId4"/>
+    <p:sldLayoutId id="2147483741" r:id="rId5"/>
+    <p:sldLayoutId id="2147483742" r:id="rId6"/>
+    <p:sldLayoutId id="2147483743" r:id="rId7"/>
+    <p:sldLayoutId id="2147483744" r:id="rId8"/>
+    <p:sldLayoutId id="2147483745" r:id="rId9"/>
+    <p:sldLayoutId id="2147483746" r:id="rId10"/>
+    <p:sldLayoutId id="2147483747" r:id="rId11"/>
+    <p:sldLayoutId id="2147483748" r:id="rId12"/>
+    <p:sldLayoutId id="2147483749" r:id="rId13"/>
+    <p:sldLayoutId id="2147483750" r:id="rId14"/>
+    <p:sldLayoutId id="2147483751" r:id="rId15"/>
+    <p:sldLayoutId id="2147483752" r:id="rId16"/>
+    <p:sldLayoutId id="2147483753" r:id="rId17"/>
+    <p:sldLayoutId id="2147483754" r:id="rId18"/>
   </p:sldLayoutIdLst>
   <p:txStyles>
     <p:titleStyle>
@@ -6359,349 +6364,6 @@
           <a:chExt cx="0" cy="0"/>
         </a:xfrm>
       </p:grpSpPr>
-      <p:pic>
-        <p:nvPicPr>
-          <p:cNvPr id="24" name="Picture 23">
-            <a:extLst>
-              <a:ext uri="{FF2B5EF4-FFF2-40B4-BE49-F238E27FC236}">
-                <a16:creationId xmlns:a16="http://schemas.microsoft.com/office/drawing/2014/main" id="{090CCBC9-586C-4528-9653-350706479A05}"/>
-              </a:ext>
-              <a:ext uri="{C183D7F6-B498-43B3-948B-1728B52AA6E4}">
-                <adec:decorative xmlns:adec="http://schemas.microsoft.com/office/drawing/2017/decorative" val="1"/>
-              </a:ext>
-            </a:extLst>
-          </p:cNvPr>
-          <p:cNvPicPr>
-            <a:picLocks noGrp="1" noRot="1" noChangeAspect="1" noMove="1" noResize="1" noEditPoints="1" noAdjustHandles="1" noChangeArrowheads="1" noChangeShapeType="1" noCrop="1"/>
-          </p:cNvPicPr>
-          <p:nvPr>
-            <p:extLst>
-              <p:ext uri="{386F3935-93C4-4BCD-93E2-E3B085C9AB24}">
-                <p16:designElem xmlns:p16="http://schemas.microsoft.com/office/powerpoint/2015/main" val="1"/>
-              </p:ext>
-            </p:extLst>
-          </p:nvPr>
-        </p:nvPicPr>
-        <p:blipFill>
-          <a:blip r:embed="rId3">
-            <a:extLst>
-              <a:ext uri="{28A0092B-C50C-407E-A947-70E740481C1C}">
-                <a14:useLocalDpi xmlns:a14="http://schemas.microsoft.com/office/drawing/2010/main" val="0"/>
-              </a:ext>
-            </a:extLst>
-          </a:blip>
-          <a:stretch>
-            <a:fillRect/>
-          </a:stretch>
-        </p:blipFill>
-        <p:spPr>
-          <a:xfrm>
-            <a:off x="0" y="0"/>
-            <a:ext cx="12192000" cy="6858000"/>
-          </a:xfrm>
-          <a:prstGeom prst="rect">
-            <a:avLst/>
-          </a:prstGeom>
-        </p:spPr>
-      </p:pic>
-      <p:sp useBgFill="1">
-        <p:nvSpPr>
-          <p:cNvPr id="26" name="Freeform 16">
-            <a:extLst>
-              <a:ext uri="{FF2B5EF4-FFF2-40B4-BE49-F238E27FC236}">
-                <a16:creationId xmlns:a16="http://schemas.microsoft.com/office/drawing/2014/main" id="{3DC0375C-BE5A-4736-A815-015CD223F50C}"/>
-              </a:ext>
-              <a:ext uri="{C183D7F6-B498-43B3-948B-1728B52AA6E4}">
-                <adec:decorative xmlns:adec="http://schemas.microsoft.com/office/drawing/2017/decorative" val="1"/>
-              </a:ext>
-            </a:extLst>
-          </p:cNvPr>
-          <p:cNvSpPr>
-            <a:spLocks noGrp="1" noRot="1" noChangeAspect="1" noMove="1" noResize="1" noEditPoints="1" noAdjustHandles="1" noChangeArrowheads="1" noChangeShapeType="1" noTextEdit="1"/>
-          </p:cNvSpPr>
-          <p:nvPr>
-            <p:extLst>
-              <p:ext uri="{386F3935-93C4-4BCD-93E2-E3B085C9AB24}">
-                <p16:designElem xmlns:p16="http://schemas.microsoft.com/office/powerpoint/2015/main" val="1"/>
-              </p:ext>
-            </p:extLst>
-          </p:nvPr>
-        </p:nvSpPr>
-        <p:spPr>
-          <a:xfrm>
-            <a:off x="-15875" y="0"/>
-            <a:ext cx="11683810" cy="6588125"/>
-          </a:xfrm>
-          <a:custGeom>
-            <a:avLst/>
-            <a:gdLst/>
-            <a:ahLst/>
-            <a:cxnLst/>
-            <a:rect l="l" t="t" r="r" b="b"/>
-            <a:pathLst>
-              <a:path w="11683810" h="6588125">
-                <a:moveTo>
-                  <a:pt x="0" y="0"/>
-                </a:moveTo>
-                <a:lnTo>
-                  <a:pt x="11318691" y="0"/>
-                </a:lnTo>
-                <a:lnTo>
-                  <a:pt x="11683810" y="5976938"/>
-                </a:lnTo>
-                <a:lnTo>
-                  <a:pt x="15875" y="6588125"/>
-                </a:lnTo>
-                <a:cubicBezTo>
-                  <a:pt x="10583" y="4386792"/>
-                  <a:pt x="5292" y="2185458"/>
-                  <a:pt x="0" y="0"/>
-                </a:cubicBezTo>
-                <a:close/>
-              </a:path>
-            </a:pathLst>
-          </a:custGeom>
-          <a:ln>
-            <a:noFill/>
-          </a:ln>
-          <a:effectLst>
-            <a:outerShdw blurRad="101600" dist="152400" dir="4380000" algn="tl" rotWithShape="0">
-              <a:srgbClr val="000000">
-                <a:alpha val="43000"/>
-              </a:srgbClr>
-            </a:outerShdw>
-          </a:effectLst>
-        </p:spPr>
-        <p:style>
-          <a:lnRef idx="1">
-            <a:schemeClr val="accent1"/>
-          </a:lnRef>
-          <a:fillRef idx="3">
-            <a:schemeClr val="accent1"/>
-          </a:fillRef>
-          <a:effectRef idx="2">
-            <a:schemeClr val="accent1"/>
-          </a:effectRef>
-          <a:fontRef idx="minor">
-            <a:schemeClr val="lt1"/>
-          </a:fontRef>
-        </p:style>
-        <p:txBody>
-          <a:bodyPr/>
-          <a:lstStyle/>
-          <a:p>
-            <a:endParaRPr lang="en-CA"/>
-          </a:p>
-        </p:txBody>
-      </p:sp>
-      <p:sp>
-        <p:nvSpPr>
-          <p:cNvPr id="28" name="Freeform 18">
-            <a:extLst>
-              <a:ext uri="{FF2B5EF4-FFF2-40B4-BE49-F238E27FC236}">
-                <a16:creationId xmlns:a16="http://schemas.microsoft.com/office/drawing/2014/main" id="{39232249-88CC-4F51-907C-88358D82A4C4}"/>
-              </a:ext>
-              <a:ext uri="{C183D7F6-B498-43B3-948B-1728B52AA6E4}">
-                <adec:decorative xmlns:adec="http://schemas.microsoft.com/office/drawing/2017/decorative" val="1"/>
-              </a:ext>
-            </a:extLst>
-          </p:cNvPr>
-          <p:cNvSpPr>
-            <a:spLocks noGrp="1" noRot="1" noChangeAspect="1" noMove="1" noResize="1" noEditPoints="1" noAdjustHandles="1" noChangeArrowheads="1" noChangeShapeType="1" noTextEdit="1"/>
-          </p:cNvSpPr>
-          <p:nvPr>
-            <p:extLst>
-              <p:ext uri="{386F3935-93C4-4BCD-93E2-E3B085C9AB24}">
-                <p16:designElem xmlns:p16="http://schemas.microsoft.com/office/powerpoint/2015/main" val="1"/>
-              </p:ext>
-            </p:extLst>
-          </p:nvPr>
-        </p:nvSpPr>
-        <p:spPr bwMode="white">
-          <a:xfrm>
-            <a:off x="-17938" y="3165071"/>
-            <a:ext cx="11337749" cy="3146030"/>
-          </a:xfrm>
-          <a:custGeom>
-            <a:avLst/>
-            <a:gdLst>
-              <a:gd name="connsiteX0" fmla="*/ 11201371 w 11337749"/>
-              <a:gd name="connsiteY0" fmla="*/ 0 h 3146030"/>
-              <a:gd name="connsiteX1" fmla="*/ 11337749 w 11337749"/>
-              <a:gd name="connsiteY1" fmla="*/ 2542023 h 3146030"/>
-              <a:gd name="connsiteX2" fmla="*/ 8492 w 11337749"/>
-              <a:gd name="connsiteY2" fmla="*/ 3146030 h 3146030"/>
-              <a:gd name="connsiteX3" fmla="*/ 2 w 11337749"/>
-              <a:gd name="connsiteY3" fmla="*/ 587735 h 3146030"/>
-              <a:gd name="connsiteX4" fmla="*/ 0 w 11337749"/>
-              <a:gd name="connsiteY4" fmla="*/ 587038 h 3146030"/>
-            </a:gdLst>
-            <a:ahLst/>
-            <a:cxnLst>
-              <a:cxn ang="0">
-                <a:pos x="connsiteX0" y="connsiteY0"/>
-              </a:cxn>
-              <a:cxn ang="0">
-                <a:pos x="connsiteX1" y="connsiteY1"/>
-              </a:cxn>
-              <a:cxn ang="0">
-                <a:pos x="connsiteX2" y="connsiteY2"/>
-              </a:cxn>
-              <a:cxn ang="0">
-                <a:pos x="connsiteX3" y="connsiteY3"/>
-              </a:cxn>
-              <a:cxn ang="0">
-                <a:pos x="connsiteX4" y="connsiteY4"/>
-              </a:cxn>
-            </a:cxnLst>
-            <a:rect l="l" t="t" r="r" b="b"/>
-            <a:pathLst>
-              <a:path w="11337749" h="3146030">
-                <a:moveTo>
-                  <a:pt x="11201371" y="0"/>
-                </a:moveTo>
-                <a:lnTo>
-                  <a:pt x="11337749" y="2542023"/>
-                </a:lnTo>
-                <a:lnTo>
-                  <a:pt x="8492" y="3146030"/>
-                </a:lnTo>
-                <a:cubicBezTo>
-                  <a:pt x="10785" y="2572498"/>
-                  <a:pt x="1900" y="1389730"/>
-                  <a:pt x="2" y="587735"/>
-                </a:cubicBezTo>
-                <a:lnTo>
-                  <a:pt x="0" y="587038"/>
-                </a:lnTo>
-                <a:close/>
-              </a:path>
-            </a:pathLst>
-          </a:custGeom>
-          <a:gradFill flip="none" rotWithShape="1">
-            <a:gsLst>
-              <a:gs pos="34000">
-                <a:schemeClr val="accent1"/>
-              </a:gs>
-              <a:gs pos="100000">
-                <a:schemeClr val="accent1">
-                  <a:lumMod val="50000"/>
-                </a:schemeClr>
-              </a:gs>
-            </a:gsLst>
-            <a:path path="circle">
-              <a:fillToRect l="50000" t="50000" r="50000" b="50000"/>
-            </a:path>
-            <a:tileRect/>
-          </a:gradFill>
-          <a:ln>
-            <a:noFill/>
-          </a:ln>
-        </p:spPr>
-        <p:style>
-          <a:lnRef idx="1">
-            <a:schemeClr val="accent1"/>
-          </a:lnRef>
-          <a:fillRef idx="3">
-            <a:schemeClr val="accent1"/>
-          </a:fillRef>
-          <a:effectRef idx="2">
-            <a:schemeClr val="accent1"/>
-          </a:effectRef>
-          <a:fontRef idx="minor">
-            <a:schemeClr val="lt1"/>
-          </a:fontRef>
-        </p:style>
-        <p:txBody>
-          <a:bodyPr/>
-          <a:lstStyle/>
-          <a:p>
-            <a:endParaRPr lang="en-CA"/>
-          </a:p>
-        </p:txBody>
-      </p:sp>
-      <p:sp>
-        <p:nvSpPr>
-          <p:cNvPr id="30" name="Freeform 20">
-            <a:extLst>
-              <a:ext uri="{FF2B5EF4-FFF2-40B4-BE49-F238E27FC236}">
-                <a16:creationId xmlns:a16="http://schemas.microsoft.com/office/drawing/2014/main" id="{B3F32693-A363-4B3D-840C-EAB023AD002E}"/>
-              </a:ext>
-              <a:ext uri="{C183D7F6-B498-43B3-948B-1728B52AA6E4}">
-                <adec:decorative xmlns:adec="http://schemas.microsoft.com/office/drawing/2017/decorative" val="1"/>
-              </a:ext>
-            </a:extLst>
-          </p:cNvPr>
-          <p:cNvSpPr>
-            <a:spLocks noGrp="1" noRot="1" noChangeAspect="1" noMove="1" noResize="1" noEditPoints="1" noAdjustHandles="1" noChangeArrowheads="1" noChangeShapeType="1" noTextEdit="1"/>
-          </p:cNvSpPr>
-          <p:nvPr>
-            <p:extLst>
-              <p:ext uri="{386F3935-93C4-4BCD-93E2-E3B085C9AB24}">
-                <p16:designElem xmlns:p16="http://schemas.microsoft.com/office/powerpoint/2015/main" val="1"/>
-              </p:ext>
-            </p:extLst>
-          </p:nvPr>
-        </p:nvSpPr>
-        <p:spPr>
-          <a:xfrm rot="21420000">
-            <a:off x="-161800" y="293317"/>
-            <a:ext cx="11367116" cy="5751804"/>
-          </a:xfrm>
-          <a:custGeom>
-            <a:avLst/>
-            <a:gdLst/>
-            <a:ahLst/>
-            <a:cxnLst/>
-            <a:rect l="l" t="t" r="r" b="b"/>
-            <a:pathLst>
-              <a:path w="11367116" h="5751804">
-                <a:moveTo>
-                  <a:pt x="11346705" y="0"/>
-                </a:moveTo>
-                <a:cubicBezTo>
-                  <a:pt x="11353509" y="1915114"/>
-                  <a:pt x="11360312" y="3830229"/>
-                  <a:pt x="11367116" y="5745343"/>
-                </a:cubicBezTo>
-                <a:lnTo>
-                  <a:pt x="0" y="5751804"/>
-                </a:lnTo>
-              </a:path>
-            </a:pathLst>
-          </a:custGeom>
-          <a:ln w="82550">
-            <a:solidFill>
-              <a:schemeClr val="tx1">
-                <a:lumMod val="50000"/>
-                <a:lumOff val="50000"/>
-              </a:schemeClr>
-            </a:solidFill>
-            <a:miter lim="800000"/>
-          </a:ln>
-        </p:spPr>
-        <p:style>
-          <a:lnRef idx="2">
-            <a:schemeClr val="accent1"/>
-          </a:lnRef>
-          <a:fillRef idx="0">
-            <a:schemeClr val="accent1"/>
-          </a:fillRef>
-          <a:effectRef idx="1">
-            <a:schemeClr val="accent1"/>
-          </a:effectRef>
-          <a:fontRef idx="minor">
-            <a:schemeClr val="tx1"/>
-          </a:fontRef>
-        </p:style>
-        <p:txBody>
-          <a:bodyPr/>
-          <a:lstStyle/>
-          <a:p>
-            <a:endParaRPr lang="en-CA"/>
-          </a:p>
-        </p:txBody>
-      </p:sp>
       <p:sp>
         <p:nvSpPr>
           <p:cNvPr id="2" name="Title 1">
@@ -6720,7 +6382,7 @@
         </p:nvSpPr>
         <p:spPr>
           <a:xfrm rot="21420000">
-            <a:off x="532474" y="3680423"/>
+            <a:off x="713775" y="4558259"/>
             <a:ext cx="10178799" cy="1346996"/>
           </a:xfrm>
         </p:spPr>
@@ -6731,79 +6393,13 @@
           <a:lstStyle/>
           <a:p>
             <a:r>
-              <a:rPr lang="en-CA">
+              <a:rPr lang="en-CA" dirty="0">
                 <a:solidFill>
                   <a:schemeClr val="bg1"/>
                 </a:solidFill>
               </a:rPr>
               <a:t>Hardware</a:t>
             </a:r>
-          </a:p>
-        </p:txBody>
-      </p:sp>
-      <p:sp>
-        <p:nvSpPr>
-          <p:cNvPr id="32" name="5-Point Star 22">
-            <a:extLst>
-              <a:ext uri="{FF2B5EF4-FFF2-40B4-BE49-F238E27FC236}">
-                <a16:creationId xmlns:a16="http://schemas.microsoft.com/office/drawing/2014/main" id="{E3D627B7-FCE4-4B3F-9144-9A8F36FB3A2B}"/>
-              </a:ext>
-              <a:ext uri="{C183D7F6-B498-43B3-948B-1728B52AA6E4}">
-                <adec:decorative xmlns:adec="http://schemas.microsoft.com/office/drawing/2017/decorative" val="1"/>
-              </a:ext>
-            </a:extLst>
-          </p:cNvPr>
-          <p:cNvSpPr>
-            <a:spLocks noGrp="1" noRot="1" noChangeAspect="1" noMove="1" noResize="1" noEditPoints="1" noAdjustHandles="1" noChangeArrowheads="1" noChangeShapeType="1" noTextEdit="1"/>
-          </p:cNvSpPr>
-          <p:nvPr>
-            <p:extLst>
-              <p:ext uri="{386F3935-93C4-4BCD-93E2-E3B085C9AB24}">
-                <p16:designElem xmlns:p16="http://schemas.microsoft.com/office/powerpoint/2015/main" val="1"/>
-              </p:ext>
-            </p:extLst>
-          </p:nvPr>
-        </p:nvSpPr>
-        <p:spPr>
-          <a:xfrm rot="21420000">
-            <a:off x="5183431" y="5370202"/>
-            <a:ext cx="515386" cy="515386"/>
-          </a:xfrm>
-          <a:prstGeom prst="star5">
-            <a:avLst>
-              <a:gd name="adj" fmla="val 26693"/>
-              <a:gd name="hf" fmla="val 105146"/>
-              <a:gd name="vf" fmla="val 110557"/>
-            </a:avLst>
-          </a:prstGeom>
-          <a:solidFill>
-            <a:schemeClr val="tx1">
-              <a:alpha val="40000"/>
-            </a:schemeClr>
-          </a:solidFill>
-          <a:ln>
-            <a:noFill/>
-          </a:ln>
-        </p:spPr>
-        <p:style>
-          <a:lnRef idx="1">
-            <a:schemeClr val="accent1"/>
-          </a:lnRef>
-          <a:fillRef idx="3">
-            <a:schemeClr val="accent1"/>
-          </a:fillRef>
-          <a:effectRef idx="2">
-            <a:schemeClr val="accent1"/>
-          </a:effectRef>
-          <a:fontRef idx="minor">
-            <a:schemeClr val="lt1"/>
-          </a:fontRef>
-        </p:style>
-        <p:txBody>
-          <a:bodyPr/>
-          <a:lstStyle/>
-          <a:p>
-            <a:endParaRPr lang="en-CA"/>
           </a:p>
         </p:txBody>
       </p:sp>
@@ -6822,52 +6418,28 @@
           <p:nvPr/>
         </p:nvPicPr>
         <p:blipFill>
-          <a:blip r:embed="rId4"/>
-          <a:srcRect l="8782" r="12850" b="-3"/>
+          <a:blip r:embed="rId3"/>
+          <a:srcRect t="3355" r="-1" b="4317"/>
           <a:stretch>
             <a:fillRect/>
           </a:stretch>
         </p:blipFill>
         <p:spPr>
-          <a:xfrm rot="21420000">
-            <a:off x="-86426" y="-63662"/>
-            <a:ext cx="2697480" cy="3632908"/>
-          </a:xfrm>
-          <a:custGeom>
+          <a:xfrm rot="43020000">
+            <a:off x="204151" y="593290"/>
+            <a:ext cx="2469963" cy="2475217"/>
+          </a:xfrm>
+          <a:prstGeom prst="rect">
             <a:avLst/>
-            <a:gdLst/>
-            <a:ahLst/>
-            <a:cxnLst/>
-            <a:rect l="l" t="t" r="r" b="b"/>
-            <a:pathLst>
-              <a:path w="2697480" h="3632908">
-                <a:moveTo>
-                  <a:pt x="179889" y="0"/>
-                </a:moveTo>
-                <a:lnTo>
-                  <a:pt x="2697480" y="131942"/>
-                </a:lnTo>
-                <a:lnTo>
-                  <a:pt x="2697480" y="3632908"/>
-                </a:lnTo>
-                <a:lnTo>
-                  <a:pt x="0" y="3632908"/>
-                </a:lnTo>
-                <a:lnTo>
-                  <a:pt x="0" y="3432491"/>
-                </a:lnTo>
-                <a:close/>
-              </a:path>
-            </a:pathLst>
-          </a:custGeom>
+          </a:prstGeom>
         </p:spPr>
       </p:pic>
       <p:pic>
         <p:nvPicPr>
-          <p:cNvPr id="8" name="Picture 7">
+          <p:cNvPr id="7" name="Picture 6">
             <a:extLst>
               <a:ext uri="{FF2B5EF4-FFF2-40B4-BE49-F238E27FC236}">
-                <a16:creationId xmlns:a16="http://schemas.microsoft.com/office/drawing/2014/main" id="{5F811900-540A-14D1-F428-F54DED7AF66B}"/>
+                <a16:creationId xmlns:a16="http://schemas.microsoft.com/office/drawing/2014/main" id="{830D7C3E-2F0D-6A5B-4308-36AB2EC6A93D}"/>
               </a:ext>
             </a:extLst>
           </p:cNvPr>
@@ -6877,41 +6449,26 @@
           <p:nvPr/>
         </p:nvPicPr>
         <p:blipFill>
-          <a:blip r:embed="rId5"/>
-          <a:srcRect l="17410" r="21004" b="4"/>
+          <a:blip r:embed="rId4">
+            <a:extLst>
+              <a:ext uri="{28A0092B-C50C-407E-A947-70E740481C1C}">
+                <a14:useLocalDpi xmlns:a14="http://schemas.microsoft.com/office/drawing/2010/main" val="0"/>
+              </a:ext>
+            </a:extLst>
+          </a:blip>
+          <a:srcRect r="1" b="3046"/>
           <a:stretch>
             <a:fillRect/>
           </a:stretch>
         </p:blipFill>
         <p:spPr>
           <a:xfrm rot="21420000">
-            <a:off x="2730290" y="-72981"/>
-            <a:ext cx="2697481" cy="3492906"/>
-          </a:xfrm>
-          <a:custGeom>
+            <a:off x="2981778" y="456814"/>
+            <a:ext cx="2469963" cy="2406798"/>
+          </a:xfrm>
+          <a:prstGeom prst="rect">
             <a:avLst/>
-            <a:gdLst/>
-            <a:ahLst/>
-            <a:cxnLst/>
-            <a:rect l="l" t="t" r="r" b="b"/>
-            <a:pathLst>
-              <a:path w="2697481" h="3492906">
-                <a:moveTo>
-                  <a:pt x="0" y="0"/>
-                </a:moveTo>
-                <a:lnTo>
-                  <a:pt x="2697481" y="141369"/>
-                </a:lnTo>
-                <a:lnTo>
-                  <a:pt x="2697480" y="3492906"/>
-                </a:lnTo>
-                <a:lnTo>
-                  <a:pt x="0" y="3492906"/>
-                </a:lnTo>
-                <a:close/>
-              </a:path>
-            </a:pathLst>
-          </a:custGeom>
+          </a:prstGeom>
         </p:spPr>
       </p:pic>
       <p:pic>
@@ -6929,41 +6486,20 @@
           <p:nvPr/>
         </p:nvPicPr>
         <p:blipFill>
-          <a:blip r:embed="rId6"/>
-          <a:srcRect l="16520" r="11029" b="1"/>
+          <a:blip r:embed="rId5"/>
+          <a:srcRect l="6694" r="1199" b="-3"/>
           <a:stretch>
             <a:fillRect/>
           </a:stretch>
         </p:blipFill>
         <p:spPr>
-          <a:xfrm rot="21420000">
-            <a:off x="5553345" y="-72877"/>
-            <a:ext cx="2697480" cy="3341543"/>
-          </a:xfrm>
-          <a:custGeom>
+          <a:xfrm rot="43020000">
+            <a:off x="5571181" y="317686"/>
+            <a:ext cx="2469963" cy="2406798"/>
+          </a:xfrm>
+          <a:prstGeom prst="rect">
             <a:avLst/>
-            <a:gdLst/>
-            <a:ahLst/>
-            <a:cxnLst/>
-            <a:rect l="l" t="t" r="r" b="b"/>
-            <a:pathLst>
-              <a:path w="2697480" h="3341543">
-                <a:moveTo>
-                  <a:pt x="0" y="0"/>
-                </a:moveTo>
-                <a:lnTo>
-                  <a:pt x="2697480" y="141369"/>
-                </a:lnTo>
-                <a:lnTo>
-                  <a:pt x="2697480" y="3341543"/>
-                </a:lnTo>
-                <a:lnTo>
-                  <a:pt x="0" y="3341543"/>
-                </a:lnTo>
-                <a:close/>
-              </a:path>
-            </a:pathLst>
-          </a:custGeom>
+          </a:prstGeom>
         </p:spPr>
       </p:pic>
       <p:pic>
@@ -6981,43 +6517,299 @@
           <p:nvPr/>
         </p:nvPicPr>
         <p:blipFill>
-          <a:blip r:embed="rId7"/>
-          <a:srcRect l="18240" r="17705" b="1"/>
+          <a:blip r:embed="rId6"/>
+          <a:srcRect l="11399" r="10861" b="-3"/>
           <a:stretch>
             <a:fillRect/>
           </a:stretch>
         </p:blipFill>
         <p:spPr>
-          <a:xfrm rot="21420000">
-            <a:off x="8375703" y="-72773"/>
-            <a:ext cx="2697480" cy="3189967"/>
-          </a:xfrm>
-          <a:custGeom>
+          <a:xfrm rot="43020000">
+            <a:off x="8160133" y="175527"/>
+            <a:ext cx="2469963" cy="2406798"/>
+          </a:xfrm>
+          <a:prstGeom prst="rect">
             <a:avLst/>
-            <a:gdLst/>
-            <a:ahLst/>
-            <a:cxnLst/>
-            <a:rect l="l" t="t" r="r" b="b"/>
-            <a:pathLst>
-              <a:path w="2697480" h="3189967">
-                <a:moveTo>
-                  <a:pt x="0" y="0"/>
-                </a:moveTo>
-                <a:lnTo>
-                  <a:pt x="2697480" y="141369"/>
-                </a:lnTo>
-                <a:lnTo>
-                  <a:pt x="2697480" y="3189967"/>
-                </a:lnTo>
-                <a:lnTo>
-                  <a:pt x="0" y="3189967"/>
-                </a:lnTo>
-                <a:close/>
-              </a:path>
-            </a:pathLst>
-          </a:custGeom>
+          </a:prstGeom>
         </p:spPr>
       </p:pic>
+      <p:sp>
+        <p:nvSpPr>
+          <p:cNvPr id="9" name="TextBox 8">
+            <a:extLst>
+              <a:ext uri="{FF2B5EF4-FFF2-40B4-BE49-F238E27FC236}">
+                <a16:creationId xmlns:a16="http://schemas.microsoft.com/office/drawing/2014/main" id="{CBD927E3-1256-ADAA-DE1F-BC7D11ADAF0B}"/>
+              </a:ext>
+            </a:extLst>
+          </p:cNvPr>
+          <p:cNvSpPr txBox="1"/>
+          <p:nvPr/>
+        </p:nvSpPr>
+        <p:spPr>
+          <a:xfrm rot="21395893">
+            <a:off x="212146" y="3144521"/>
+            <a:ext cx="2683313" cy="923330"/>
+          </a:xfrm>
+          <a:prstGeom prst="rect">
+            <a:avLst/>
+          </a:prstGeom>
+          <a:noFill/>
+        </p:spPr>
+        <p:txBody>
+          <a:bodyPr wrap="square" rtlCol="0">
+            <a:spAutoFit/>
+          </a:bodyPr>
+          <a:lstStyle/>
+          <a:p>
+            <a:pPr algn="ctr"/>
+            <a:r>
+              <a:rPr lang="en-CA" dirty="0"/>
+              <a:t>4690 Fingerprint Scanner</a:t>
+            </a:r>
+          </a:p>
+          <a:p>
+            <a:pPr algn="ctr"/>
+            <a:endParaRPr lang="en-CA" dirty="0"/>
+          </a:p>
+          <a:p>
+            <a:pPr algn="ctr"/>
+            <a:r>
+              <a:rPr lang="en-CA" dirty="0"/>
+              <a:t>Anthony Macia</a:t>
+            </a:r>
+          </a:p>
+        </p:txBody>
+      </p:sp>
+      <p:sp>
+        <p:nvSpPr>
+          <p:cNvPr id="10" name="AutoShape 6">
+            <a:extLst>
+              <a:ext uri="{FF2B5EF4-FFF2-40B4-BE49-F238E27FC236}">
+                <a16:creationId xmlns:a16="http://schemas.microsoft.com/office/drawing/2014/main" id="{45F86BFE-888B-5C1C-7B7F-E72316F78F09}"/>
+              </a:ext>
+            </a:extLst>
+          </p:cNvPr>
+          <p:cNvSpPr>
+            <a:spLocks noChangeAspect="1" noChangeArrowheads="1"/>
+          </p:cNvSpPr>
+          <p:nvPr/>
+        </p:nvSpPr>
+        <p:spPr bwMode="auto">
+          <a:xfrm>
+            <a:off x="4724400" y="4139169"/>
+            <a:ext cx="1219200" cy="1219200"/>
+          </a:xfrm>
+          <a:prstGeom prst="rect">
+            <a:avLst/>
+          </a:prstGeom>
+          <a:noFill/>
+          <a:extLst>
+            <a:ext uri="{909E8E84-426E-40DD-AFC4-6F175D3DCCD1}">
+              <a14:hiddenFill xmlns:a14="http://schemas.microsoft.com/office/drawing/2010/main">
+                <a:solidFill>
+                  <a:srgbClr val="FFFFFF"/>
+                </a:solidFill>
+              </a14:hiddenFill>
+            </a:ext>
+          </a:extLst>
+        </p:spPr>
+        <p:txBody>
+          <a:bodyPr vert="horz" wrap="square" lIns="91440" tIns="45720" rIns="91440" bIns="45720" numCol="1" anchor="t" anchorCtr="0" compatLnSpc="1">
+            <a:prstTxWarp prst="textNoShape">
+              <a:avLst/>
+            </a:prstTxWarp>
+          </a:bodyPr>
+          <a:lstStyle/>
+          <a:p>
+            <a:endParaRPr lang="en-CA" dirty="0"/>
+          </a:p>
+        </p:txBody>
+      </p:sp>
+      <p:sp>
+        <p:nvSpPr>
+          <p:cNvPr id="11" name="AutoShape 8">
+            <a:extLst>
+              <a:ext uri="{FF2B5EF4-FFF2-40B4-BE49-F238E27FC236}">
+                <a16:creationId xmlns:a16="http://schemas.microsoft.com/office/drawing/2014/main" id="{5024F740-0985-CBDE-8F5E-3ED1FA4A30D7}"/>
+              </a:ext>
+            </a:extLst>
+          </p:cNvPr>
+          <p:cNvSpPr>
+            <a:spLocks noChangeAspect="1" noChangeArrowheads="1"/>
+          </p:cNvSpPr>
+          <p:nvPr/>
+        </p:nvSpPr>
+        <p:spPr bwMode="auto">
+          <a:xfrm rot="21405017">
+            <a:off x="3603899" y="3038716"/>
+            <a:ext cx="1434990" cy="1132114"/>
+          </a:xfrm>
+          <a:prstGeom prst="rect">
+            <a:avLst/>
+          </a:prstGeom>
+          <a:noFill/>
+          <a:extLst>
+            <a:ext uri="{909E8E84-426E-40DD-AFC4-6F175D3DCCD1}">
+              <a14:hiddenFill xmlns:a14="http://schemas.microsoft.com/office/drawing/2010/main">
+                <a:solidFill>
+                  <a:srgbClr val="FFFFFF"/>
+                </a:solidFill>
+              </a14:hiddenFill>
+            </a:ext>
+          </a:extLst>
+        </p:spPr>
+        <p:txBody>
+          <a:bodyPr vert="horz" wrap="square" lIns="91440" tIns="45720" rIns="91440" bIns="45720" numCol="1" anchor="t" anchorCtr="0" compatLnSpc="1">
+            <a:prstTxWarp prst="textNoShape">
+              <a:avLst/>
+            </a:prstTxWarp>
+          </a:bodyPr>
+          <a:lstStyle/>
+          <a:p>
+            <a:pPr algn="ctr"/>
+            <a:r>
+              <a:rPr lang="en-CA" dirty="0"/>
+              <a:t>Zio </a:t>
+            </a:r>
+            <a:r>
+              <a:rPr lang="en-CA" dirty="0" err="1"/>
+              <a:t>Oled</a:t>
+            </a:r>
+            <a:endParaRPr lang="en-CA" dirty="0"/>
+          </a:p>
+          <a:p>
+            <a:pPr algn="ctr"/>
+            <a:endParaRPr lang="en-CA" dirty="0"/>
+          </a:p>
+          <a:p>
+            <a:pPr algn="ctr"/>
+            <a:r>
+              <a:rPr lang="en-CA" dirty="0"/>
+              <a:t>Tyler Meira</a:t>
+            </a:r>
+          </a:p>
+        </p:txBody>
+      </p:sp>
+      <p:sp>
+        <p:nvSpPr>
+          <p:cNvPr id="13" name="AutoShape 10">
+            <a:extLst>
+              <a:ext uri="{FF2B5EF4-FFF2-40B4-BE49-F238E27FC236}">
+                <a16:creationId xmlns:a16="http://schemas.microsoft.com/office/drawing/2014/main" id="{E7A0D6DC-69CD-60CF-EE81-106DF8D184AF}"/>
+              </a:ext>
+            </a:extLst>
+          </p:cNvPr>
+          <p:cNvSpPr>
+            <a:spLocks noChangeAspect="1" noChangeArrowheads="1"/>
+          </p:cNvSpPr>
+          <p:nvPr/>
+        </p:nvSpPr>
+        <p:spPr bwMode="auto">
+          <a:xfrm rot="21438879">
+            <a:off x="6346372" y="2843548"/>
+            <a:ext cx="1194472" cy="1194472"/>
+          </a:xfrm>
+          <a:prstGeom prst="rect">
+            <a:avLst/>
+          </a:prstGeom>
+          <a:noFill/>
+          <a:extLst>
+            <a:ext uri="{909E8E84-426E-40DD-AFC4-6F175D3DCCD1}">
+              <a14:hiddenFill xmlns:a14="http://schemas.microsoft.com/office/drawing/2010/main">
+                <a:solidFill>
+                  <a:srgbClr val="FFFFFF"/>
+                </a:solidFill>
+              </a14:hiddenFill>
+            </a:ext>
+          </a:extLst>
+        </p:spPr>
+        <p:txBody>
+          <a:bodyPr vert="horz" wrap="square" lIns="91440" tIns="45720" rIns="91440" bIns="45720" numCol="1" anchor="t" anchorCtr="0" compatLnSpc="1">
+            <a:prstTxWarp prst="textNoShape">
+              <a:avLst/>
+            </a:prstTxWarp>
+          </a:bodyPr>
+          <a:lstStyle/>
+          <a:p>
+            <a:pPr algn="ctr"/>
+            <a:r>
+              <a:rPr lang="en-CA" dirty="0"/>
+              <a:t>AtTiny84</a:t>
+            </a:r>
+          </a:p>
+          <a:p>
+            <a:pPr algn="ctr"/>
+            <a:endParaRPr lang="en-CA" dirty="0"/>
+          </a:p>
+          <a:p>
+            <a:pPr algn="ctr"/>
+            <a:r>
+              <a:rPr lang="en-CA" dirty="0"/>
+              <a:t>Ngoc Le</a:t>
+            </a:r>
+          </a:p>
+        </p:txBody>
+      </p:sp>
+      <p:sp>
+        <p:nvSpPr>
+          <p:cNvPr id="14" name="AutoShape 12">
+            <a:extLst>
+              <a:ext uri="{FF2B5EF4-FFF2-40B4-BE49-F238E27FC236}">
+                <a16:creationId xmlns:a16="http://schemas.microsoft.com/office/drawing/2014/main" id="{B3A645AD-F60F-B195-4ADC-B4DFAC0DEE06}"/>
+              </a:ext>
+            </a:extLst>
+          </p:cNvPr>
+          <p:cNvSpPr>
+            <a:spLocks noChangeAspect="1" noChangeArrowheads="1"/>
+          </p:cNvSpPr>
+          <p:nvPr/>
+        </p:nvSpPr>
+        <p:spPr bwMode="auto">
+          <a:xfrm rot="21405402">
+            <a:off x="8671996" y="2666736"/>
+            <a:ext cx="1870975" cy="1409831"/>
+          </a:xfrm>
+          <a:prstGeom prst="rect">
+            <a:avLst/>
+          </a:prstGeom>
+          <a:noFill/>
+          <a:extLst>
+            <a:ext uri="{909E8E84-426E-40DD-AFC4-6F175D3DCCD1}">
+              <a14:hiddenFill xmlns:a14="http://schemas.microsoft.com/office/drawing/2010/main">
+                <a:solidFill>
+                  <a:srgbClr val="FFFFFF"/>
+                </a:solidFill>
+              </a14:hiddenFill>
+            </a:ext>
+          </a:extLst>
+        </p:spPr>
+        <p:txBody>
+          <a:bodyPr vert="horz" wrap="square" lIns="91440" tIns="45720" rIns="91440" bIns="45720" numCol="1" anchor="t" anchorCtr="0" compatLnSpc="1">
+            <a:prstTxWarp prst="textNoShape">
+              <a:avLst/>
+            </a:prstTxWarp>
+          </a:bodyPr>
+          <a:lstStyle/>
+          <a:p>
+            <a:pPr algn="ctr"/>
+            <a:r>
+              <a:rPr lang="en-CA" dirty="0"/>
+              <a:t>360 Micro Servo</a:t>
+            </a:r>
+          </a:p>
+          <a:p>
+            <a:pPr algn="ctr"/>
+            <a:endParaRPr lang="en-CA" dirty="0"/>
+          </a:p>
+          <a:p>
+            <a:pPr algn="ctr"/>
+            <a:r>
+              <a:rPr lang="en-CA" dirty="0"/>
+              <a:t>Amos Sadiq</a:t>
+            </a:r>
+          </a:p>
+        </p:txBody>
+      </p:sp>
     </p:spTree>
     <p:extLst>
       <p:ext uri="{BB962C8B-B14F-4D97-AF65-F5344CB8AC3E}">
@@ -7163,596 +6955,6 @@
       </p:grpSpPr>
       <p:pic>
         <p:nvPicPr>
-          <p:cNvPr id="16" name="Picture 15">
-            <a:extLst>
-              <a:ext uri="{FF2B5EF4-FFF2-40B4-BE49-F238E27FC236}">
-                <a16:creationId xmlns:a16="http://schemas.microsoft.com/office/drawing/2014/main" id="{4412F17E-378A-48DF-A7D0-616F75D5C45C}"/>
-              </a:ext>
-              <a:ext uri="{C183D7F6-B498-43B3-948B-1728B52AA6E4}">
-                <adec:decorative xmlns:adec="http://schemas.microsoft.com/office/drawing/2017/decorative" val="1"/>
-              </a:ext>
-            </a:extLst>
-          </p:cNvPr>
-          <p:cNvPicPr>
-            <a:picLocks noGrp="1" noRot="1" noChangeAspect="1" noMove="1" noResize="1" noEditPoints="1" noAdjustHandles="1" noChangeArrowheads="1" noChangeShapeType="1" noCrop="1"/>
-          </p:cNvPicPr>
-          <p:nvPr>
-            <p:extLst>
-              <p:ext uri="{386F3935-93C4-4BCD-93E2-E3B085C9AB24}">
-                <p16:designElem xmlns:p16="http://schemas.microsoft.com/office/powerpoint/2015/main" val="1"/>
-              </p:ext>
-            </p:extLst>
-          </p:nvPr>
-        </p:nvPicPr>
-        <p:blipFill>
-          <a:blip r:embed="rId3">
-            <a:extLst>
-              <a:ext uri="{28A0092B-C50C-407E-A947-70E740481C1C}">
-                <a14:useLocalDpi xmlns:a14="http://schemas.microsoft.com/office/drawing/2010/main" val="0"/>
-              </a:ext>
-            </a:extLst>
-          </a:blip>
-          <a:stretch>
-            <a:fillRect/>
-          </a:stretch>
-        </p:blipFill>
-        <p:spPr>
-          <a:xfrm>
-            <a:off x="0" y="0"/>
-            <a:ext cx="12192000" cy="6858000"/>
-          </a:xfrm>
-          <a:prstGeom prst="rect">
-            <a:avLst/>
-          </a:prstGeom>
-        </p:spPr>
-      </p:pic>
-      <p:sp useBgFill="1">
-        <p:nvSpPr>
-          <p:cNvPr id="18" name="Freeform 11">
-            <a:extLst>
-              <a:ext uri="{FF2B5EF4-FFF2-40B4-BE49-F238E27FC236}">
-                <a16:creationId xmlns:a16="http://schemas.microsoft.com/office/drawing/2014/main" id="{908915DF-1091-4602-9B1A-C06774398E85}"/>
-              </a:ext>
-              <a:ext uri="{C183D7F6-B498-43B3-948B-1728B52AA6E4}">
-                <adec:decorative xmlns:adec="http://schemas.microsoft.com/office/drawing/2017/decorative" val="1"/>
-              </a:ext>
-            </a:extLst>
-          </p:cNvPr>
-          <p:cNvSpPr>
-            <a:spLocks noGrp="1" noRot="1" noChangeAspect="1" noMove="1" noResize="1" noEditPoints="1" noAdjustHandles="1" noChangeArrowheads="1" noChangeShapeType="1" noTextEdit="1"/>
-          </p:cNvSpPr>
-          <p:nvPr>
-            <p:extLst>
-              <p:ext uri="{386F3935-93C4-4BCD-93E2-E3B085C9AB24}">
-                <p16:designElem xmlns:p16="http://schemas.microsoft.com/office/powerpoint/2015/main" val="1"/>
-              </p:ext>
-            </p:extLst>
-          </p:nvPr>
-        </p:nvSpPr>
-        <p:spPr>
-          <a:xfrm>
-            <a:off x="-15875" y="0"/>
-            <a:ext cx="11683810" cy="6588125"/>
-          </a:xfrm>
-          <a:custGeom>
-            <a:avLst/>
-            <a:gdLst/>
-            <a:ahLst/>
-            <a:cxnLst/>
-            <a:rect l="l" t="t" r="r" b="b"/>
-            <a:pathLst>
-              <a:path w="11683810" h="6588125">
-                <a:moveTo>
-                  <a:pt x="0" y="0"/>
-                </a:moveTo>
-                <a:lnTo>
-                  <a:pt x="11318691" y="0"/>
-                </a:lnTo>
-                <a:lnTo>
-                  <a:pt x="11683810" y="5976938"/>
-                </a:lnTo>
-                <a:lnTo>
-                  <a:pt x="15875" y="6588125"/>
-                </a:lnTo>
-                <a:cubicBezTo>
-                  <a:pt x="10583" y="4386792"/>
-                  <a:pt x="5292" y="2185458"/>
-                  <a:pt x="0" y="0"/>
-                </a:cubicBezTo>
-                <a:close/>
-              </a:path>
-            </a:pathLst>
-          </a:custGeom>
-          <a:ln>
-            <a:noFill/>
-          </a:ln>
-          <a:effectLst>
-            <a:outerShdw blurRad="101600" dist="152400" dir="4380000" algn="tl" rotWithShape="0">
-              <a:srgbClr val="000000">
-                <a:alpha val="43000"/>
-              </a:srgbClr>
-            </a:outerShdw>
-          </a:effectLst>
-        </p:spPr>
-        <p:style>
-          <a:lnRef idx="1">
-            <a:schemeClr val="accent1"/>
-          </a:lnRef>
-          <a:fillRef idx="3">
-            <a:schemeClr val="accent1"/>
-          </a:fillRef>
-          <a:effectRef idx="2">
-            <a:schemeClr val="accent1"/>
-          </a:effectRef>
-          <a:fontRef idx="minor">
-            <a:schemeClr val="lt1"/>
-          </a:fontRef>
-        </p:style>
-        <p:txBody>
-          <a:bodyPr/>
-          <a:lstStyle/>
-          <a:p>
-            <a:endParaRPr lang="en-CA"/>
-          </a:p>
-        </p:txBody>
-      </p:sp>
-      <p:sp>
-        <p:nvSpPr>
-          <p:cNvPr id="20" name="Freeform 13">
-            <a:extLst>
-              <a:ext uri="{FF2B5EF4-FFF2-40B4-BE49-F238E27FC236}">
-                <a16:creationId xmlns:a16="http://schemas.microsoft.com/office/drawing/2014/main" id="{6CFA88D5-4955-401D-884D-20970DD4EA65}"/>
-              </a:ext>
-              <a:ext uri="{C183D7F6-B498-43B3-948B-1728B52AA6E4}">
-                <adec:decorative xmlns:adec="http://schemas.microsoft.com/office/drawing/2017/decorative" val="1"/>
-              </a:ext>
-            </a:extLst>
-          </p:cNvPr>
-          <p:cNvSpPr>
-            <a:spLocks noGrp="1" noRot="1" noChangeAspect="1" noMove="1" noResize="1" noEditPoints="1" noAdjustHandles="1" noChangeArrowheads="1" noChangeShapeType="1" noTextEdit="1"/>
-          </p:cNvSpPr>
-          <p:nvPr>
-            <p:extLst>
-              <p:ext uri="{386F3935-93C4-4BCD-93E2-E3B085C9AB24}">
-                <p16:designElem xmlns:p16="http://schemas.microsoft.com/office/powerpoint/2015/main" val="1"/>
-              </p:ext>
-            </p:extLst>
-          </p:nvPr>
-        </p:nvSpPr>
-        <p:spPr>
-          <a:xfrm>
-            <a:off x="0" y="4282257"/>
-            <a:ext cx="11329257" cy="2028845"/>
-          </a:xfrm>
-          <a:custGeom>
-            <a:avLst/>
-            <a:gdLst/>
-            <a:ahLst/>
-            <a:cxnLst/>
-            <a:rect l="l" t="t" r="r" b="b"/>
-            <a:pathLst>
-              <a:path w="11329257" h="2028845">
-                <a:moveTo>
-                  <a:pt x="0" y="588520"/>
-                </a:moveTo>
-                <a:lnTo>
-                  <a:pt x="11244075" y="0"/>
-                </a:lnTo>
-                <a:lnTo>
-                  <a:pt x="11329257" y="1424838"/>
-                </a:lnTo>
-                <a:lnTo>
-                  <a:pt x="0" y="2028845"/>
-                </a:lnTo>
-                <a:lnTo>
-                  <a:pt x="0" y="588520"/>
-                </a:lnTo>
-                <a:close/>
-              </a:path>
-            </a:pathLst>
-          </a:custGeom>
-          <a:gradFill flip="none" rotWithShape="1">
-            <a:gsLst>
-              <a:gs pos="34000">
-                <a:schemeClr val="accent1"/>
-              </a:gs>
-              <a:gs pos="100000">
-                <a:schemeClr val="accent1">
-                  <a:lumMod val="50000"/>
-                </a:schemeClr>
-              </a:gs>
-            </a:gsLst>
-            <a:path path="circle">
-              <a:fillToRect l="50000" t="50000" r="50000" b="50000"/>
-            </a:path>
-            <a:tileRect/>
-          </a:gradFill>
-          <a:ln>
-            <a:noFill/>
-          </a:ln>
-        </p:spPr>
-        <p:style>
-          <a:lnRef idx="1">
-            <a:schemeClr val="accent1"/>
-          </a:lnRef>
-          <a:fillRef idx="3">
-            <a:schemeClr val="accent1"/>
-          </a:fillRef>
-          <a:effectRef idx="2">
-            <a:schemeClr val="accent1"/>
-          </a:effectRef>
-          <a:fontRef idx="minor">
-            <a:schemeClr val="lt1"/>
-          </a:fontRef>
-        </p:style>
-        <p:txBody>
-          <a:bodyPr/>
-          <a:lstStyle/>
-          <a:p>
-            <a:endParaRPr lang="en-CA"/>
-          </a:p>
-        </p:txBody>
-      </p:sp>
-      <p:sp>
-        <p:nvSpPr>
-          <p:cNvPr id="22" name="Freeform 25">
-            <a:extLst>
-              <a:ext uri="{FF2B5EF4-FFF2-40B4-BE49-F238E27FC236}">
-                <a16:creationId xmlns:a16="http://schemas.microsoft.com/office/drawing/2014/main" id="{164D267B-C17A-4774-88F8-99CC562E3ABC}"/>
-              </a:ext>
-              <a:ext uri="{C183D7F6-B498-43B3-948B-1728B52AA6E4}">
-                <adec:decorative xmlns:adec="http://schemas.microsoft.com/office/drawing/2017/decorative" val="1"/>
-              </a:ext>
-            </a:extLst>
-          </p:cNvPr>
-          <p:cNvSpPr>
-            <a:spLocks noGrp="1" noRot="1" noChangeAspect="1" noMove="1" noResize="1" noEditPoints="1" noAdjustHandles="1" noChangeArrowheads="1" noChangeShapeType="1" noTextEdit="1"/>
-          </p:cNvSpPr>
-          <p:nvPr>
-            <p:extLst>
-              <p:ext uri="{386F3935-93C4-4BCD-93E2-E3B085C9AB24}">
-                <p16:designElem xmlns:p16="http://schemas.microsoft.com/office/powerpoint/2015/main" val="1"/>
-              </p:ext>
-            </p:extLst>
-          </p:nvPr>
-        </p:nvSpPr>
-        <p:spPr>
-          <a:xfrm>
-            <a:off x="0" y="0"/>
-            <a:ext cx="8719579" cy="456877"/>
-          </a:xfrm>
-          <a:custGeom>
-            <a:avLst/>
-            <a:gdLst/>
-            <a:ahLst/>
-            <a:cxnLst/>
-            <a:rect l="l" t="t" r="r" b="b"/>
-            <a:pathLst>
-              <a:path w="8719579" h="456877">
-                <a:moveTo>
-                  <a:pt x="0" y="0"/>
-                </a:moveTo>
-                <a:lnTo>
-                  <a:pt x="8719579" y="0"/>
-                </a:lnTo>
-                <a:lnTo>
-                  <a:pt x="0" y="456877"/>
-                </a:lnTo>
-                <a:lnTo>
-                  <a:pt x="0" y="0"/>
-                </a:lnTo>
-                <a:close/>
-              </a:path>
-            </a:pathLst>
-          </a:custGeom>
-          <a:gradFill flip="none" rotWithShape="1">
-            <a:gsLst>
-              <a:gs pos="34000">
-                <a:schemeClr val="accent1"/>
-              </a:gs>
-              <a:gs pos="100000">
-                <a:schemeClr val="accent1">
-                  <a:lumMod val="50000"/>
-                </a:schemeClr>
-              </a:gs>
-            </a:gsLst>
-            <a:path path="circle">
-              <a:fillToRect l="50000" t="50000" r="50000" b="50000"/>
-            </a:path>
-            <a:tileRect/>
-          </a:gradFill>
-          <a:ln>
-            <a:noFill/>
-          </a:ln>
-        </p:spPr>
-        <p:style>
-          <a:lnRef idx="1">
-            <a:schemeClr val="accent1"/>
-          </a:lnRef>
-          <a:fillRef idx="3">
-            <a:schemeClr val="accent1"/>
-          </a:fillRef>
-          <a:effectRef idx="2">
-            <a:schemeClr val="accent1"/>
-          </a:effectRef>
-          <a:fontRef idx="minor">
-            <a:schemeClr val="lt1"/>
-          </a:fontRef>
-        </p:style>
-        <p:txBody>
-          <a:bodyPr/>
-          <a:lstStyle/>
-          <a:p>
-            <a:endParaRPr lang="en-CA"/>
-          </a:p>
-        </p:txBody>
-      </p:sp>
-      <p:sp>
-        <p:nvSpPr>
-          <p:cNvPr id="24" name="Freeform 14">
-            <a:extLst>
-              <a:ext uri="{FF2B5EF4-FFF2-40B4-BE49-F238E27FC236}">
-                <a16:creationId xmlns:a16="http://schemas.microsoft.com/office/drawing/2014/main" id="{C1C5AED6-50C3-434F-B16D-A7A833763D53}"/>
-              </a:ext>
-              <a:ext uri="{C183D7F6-B498-43B3-948B-1728B52AA6E4}">
-                <adec:decorative xmlns:adec="http://schemas.microsoft.com/office/drawing/2017/decorative" val="1"/>
-              </a:ext>
-            </a:extLst>
-          </p:cNvPr>
-          <p:cNvSpPr>
-            <a:spLocks noGrp="1" noRot="1" noChangeAspect="1" noMove="1" noResize="1" noEditPoints="1" noAdjustHandles="1" noChangeArrowheads="1" noChangeShapeType="1" noTextEdit="1"/>
-          </p:cNvSpPr>
-          <p:nvPr>
-            <p:extLst>
-              <p:ext uri="{386F3935-93C4-4BCD-93E2-E3B085C9AB24}">
-                <p16:designElem xmlns:p16="http://schemas.microsoft.com/office/powerpoint/2015/main" val="1"/>
-              </p:ext>
-            </p:extLst>
-          </p:nvPr>
-        </p:nvSpPr>
-        <p:spPr>
-          <a:xfrm rot="21420000">
-            <a:off x="-161800" y="293317"/>
-            <a:ext cx="11367116" cy="5751804"/>
-          </a:xfrm>
-          <a:custGeom>
-            <a:avLst/>
-            <a:gdLst/>
-            <a:ahLst/>
-            <a:cxnLst/>
-            <a:rect l="l" t="t" r="r" b="b"/>
-            <a:pathLst>
-              <a:path w="11367116" h="5751804">
-                <a:moveTo>
-                  <a:pt x="11346705" y="0"/>
-                </a:moveTo>
-                <a:cubicBezTo>
-                  <a:pt x="11353509" y="1915114"/>
-                  <a:pt x="11360312" y="3830229"/>
-                  <a:pt x="11367116" y="5745343"/>
-                </a:cubicBezTo>
-                <a:lnTo>
-                  <a:pt x="0" y="5751804"/>
-                </a:lnTo>
-              </a:path>
-            </a:pathLst>
-          </a:custGeom>
-          <a:ln w="82550">
-            <a:solidFill>
-              <a:schemeClr val="tx1">
-                <a:lumMod val="50000"/>
-                <a:lumOff val="50000"/>
-              </a:schemeClr>
-            </a:solidFill>
-            <a:miter lim="800000"/>
-          </a:ln>
-        </p:spPr>
-        <p:style>
-          <a:lnRef idx="2">
-            <a:schemeClr val="accent1"/>
-          </a:lnRef>
-          <a:fillRef idx="0">
-            <a:schemeClr val="accent1"/>
-          </a:fillRef>
-          <a:effectRef idx="1">
-            <a:schemeClr val="accent1"/>
-          </a:effectRef>
-          <a:fontRef idx="minor">
-            <a:schemeClr val="tx1"/>
-          </a:fontRef>
-        </p:style>
-        <p:txBody>
-          <a:bodyPr/>
-          <a:lstStyle/>
-          <a:p>
-            <a:endParaRPr lang="en-CA"/>
-          </a:p>
-        </p:txBody>
-      </p:sp>
-      <p:sp>
-        <p:nvSpPr>
-          <p:cNvPr id="26" name="5-Point Star 24">
-            <a:extLst>
-              <a:ext uri="{FF2B5EF4-FFF2-40B4-BE49-F238E27FC236}">
-                <a16:creationId xmlns:a16="http://schemas.microsoft.com/office/drawing/2014/main" id="{AFF213A5-1AFF-47E9-83C0-F71BD73881B7}"/>
-              </a:ext>
-              <a:ext uri="{C183D7F6-B498-43B3-948B-1728B52AA6E4}">
-                <adec:decorative xmlns:adec="http://schemas.microsoft.com/office/drawing/2017/decorative" val="1"/>
-              </a:ext>
-            </a:extLst>
-          </p:cNvPr>
-          <p:cNvSpPr>
-            <a:spLocks noGrp="1" noRot="1" noChangeAspect="1" noMove="1" noResize="1" noEditPoints="1" noAdjustHandles="1" noChangeArrowheads="1" noChangeShapeType="1" noTextEdit="1"/>
-          </p:cNvSpPr>
-          <p:nvPr>
-            <p:extLst>
-              <p:ext uri="{386F3935-93C4-4BCD-93E2-E3B085C9AB24}">
-                <p16:designElem xmlns:p16="http://schemas.microsoft.com/office/powerpoint/2015/main" val="1"/>
-              </p:ext>
-            </p:extLst>
-          </p:nvPr>
-        </p:nvSpPr>
-        <p:spPr>
-          <a:xfrm rot="21420000">
-            <a:off x="4221385" y="5111356"/>
-            <a:ext cx="515386" cy="515386"/>
-          </a:xfrm>
-          <a:prstGeom prst="star5">
-            <a:avLst>
-              <a:gd name="adj" fmla="val 26693"/>
-              <a:gd name="hf" fmla="val 105146"/>
-              <a:gd name="vf" fmla="val 110557"/>
-            </a:avLst>
-          </a:prstGeom>
-          <a:solidFill>
-            <a:schemeClr val="tx1">
-              <a:alpha val="40000"/>
-            </a:schemeClr>
-          </a:solidFill>
-          <a:ln>
-            <a:noFill/>
-          </a:ln>
-        </p:spPr>
-        <p:style>
-          <a:lnRef idx="1">
-            <a:schemeClr val="accent1"/>
-          </a:lnRef>
-          <a:fillRef idx="3">
-            <a:schemeClr val="accent1"/>
-          </a:fillRef>
-          <a:effectRef idx="2">
-            <a:schemeClr val="accent1"/>
-          </a:effectRef>
-          <a:fontRef idx="minor">
-            <a:schemeClr val="lt1"/>
-          </a:fontRef>
-        </p:style>
-        <p:txBody>
-          <a:bodyPr/>
-          <a:lstStyle/>
-          <a:p>
-            <a:endParaRPr lang="en-CA"/>
-          </a:p>
-        </p:txBody>
-      </p:sp>
-      <p:pic>
-        <p:nvPicPr>
-          <p:cNvPr id="28" name="Picture 27">
-            <a:extLst>
-              <a:ext uri="{FF2B5EF4-FFF2-40B4-BE49-F238E27FC236}">
-                <a16:creationId xmlns:a16="http://schemas.microsoft.com/office/drawing/2014/main" id="{1979D2CD-6189-4D9F-9A62-000F33F6F38C}"/>
-              </a:ext>
-              <a:ext uri="{C183D7F6-B498-43B3-948B-1728B52AA6E4}">
-                <adec:decorative xmlns:adec="http://schemas.microsoft.com/office/drawing/2017/decorative" val="1"/>
-              </a:ext>
-            </a:extLst>
-          </p:cNvPr>
-          <p:cNvPicPr>
-            <a:picLocks noGrp="1" noRot="1" noChangeAspect="1" noMove="1" noResize="1" noEditPoints="1" noAdjustHandles="1" noChangeArrowheads="1" noChangeShapeType="1" noCrop="1"/>
-          </p:cNvPicPr>
-          <p:nvPr>
-            <p:extLst>
-              <p:ext uri="{386F3935-93C4-4BCD-93E2-E3B085C9AB24}">
-                <p16:designElem xmlns:p16="http://schemas.microsoft.com/office/powerpoint/2015/main" val="1"/>
-              </p:ext>
-            </p:extLst>
-          </p:nvPr>
-        </p:nvPicPr>
-        <p:blipFill>
-          <a:blip r:embed="rId3">
-            <a:extLst>
-              <a:ext uri="{28A0092B-C50C-407E-A947-70E740481C1C}">
-                <a14:useLocalDpi xmlns:a14="http://schemas.microsoft.com/office/drawing/2010/main" val="0"/>
-              </a:ext>
-            </a:extLst>
-          </a:blip>
-          <a:stretch>
-            <a:fillRect/>
-          </a:stretch>
-        </p:blipFill>
-        <p:spPr>
-          <a:xfrm>
-            <a:off x="0" y="0"/>
-            <a:ext cx="12192000" cy="6858000"/>
-          </a:xfrm>
-          <a:prstGeom prst="rect">
-            <a:avLst/>
-          </a:prstGeom>
-        </p:spPr>
-      </p:pic>
-      <p:sp>
-        <p:nvSpPr>
-          <p:cNvPr id="30" name="Rectangle 29">
-            <a:extLst>
-              <a:ext uri="{FF2B5EF4-FFF2-40B4-BE49-F238E27FC236}">
-                <a16:creationId xmlns:a16="http://schemas.microsoft.com/office/drawing/2014/main" id="{287FD6DC-9C9B-4408-9B78-2177E04A2677}"/>
-              </a:ext>
-              <a:ext uri="{C183D7F6-B498-43B3-948B-1728B52AA6E4}">
-                <adec:decorative xmlns:adec="http://schemas.microsoft.com/office/drawing/2017/decorative" val="1"/>
-              </a:ext>
-            </a:extLst>
-          </p:cNvPr>
-          <p:cNvSpPr>
-            <a:spLocks noGrp="1" noRot="1" noChangeAspect="1" noMove="1" noResize="1" noEditPoints="1" noAdjustHandles="1" noChangeArrowheads="1" noChangeShapeType="1" noTextEdit="1"/>
-          </p:cNvSpPr>
-          <p:nvPr>
-            <p:extLst>
-              <p:ext uri="{386F3935-93C4-4BCD-93E2-E3B085C9AB24}">
-                <p16:designElem xmlns:p16="http://schemas.microsoft.com/office/powerpoint/2015/main" val="1"/>
-              </p:ext>
-            </p:extLst>
-          </p:nvPr>
-        </p:nvSpPr>
-        <p:spPr>
-          <a:xfrm>
-            <a:off x="466954" y="457201"/>
-            <a:ext cx="11261749" cy="3343894"/>
-          </a:xfrm>
-          <a:prstGeom prst="rect">
-            <a:avLst/>
-          </a:prstGeom>
-          <a:solidFill>
-            <a:schemeClr val="bg1"/>
-          </a:solidFill>
-          <a:ln w="57150" cmpd="thinThick">
-            <a:noFill/>
-            <a:miter lim="800000"/>
-          </a:ln>
-          <a:effectLst>
-            <a:outerShdw blurRad="63500" sx="102000" sy="102000" algn="ctr" rotWithShape="0">
-              <a:prstClr val="black">
-                <a:alpha val="40000"/>
-              </a:prstClr>
-            </a:outerShdw>
-          </a:effectLst>
-        </p:spPr>
-        <p:style>
-          <a:lnRef idx="2">
-            <a:schemeClr val="accent1">
-              <a:shade val="50000"/>
-            </a:schemeClr>
-          </a:lnRef>
-          <a:fillRef idx="1">
-            <a:schemeClr val="accent1"/>
-          </a:fillRef>
-          <a:effectRef idx="0">
-            <a:schemeClr val="accent1"/>
-          </a:effectRef>
-          <a:fontRef idx="minor">
-            <a:schemeClr val="lt1"/>
-          </a:fontRef>
-        </p:style>
-        <p:txBody>
-          <a:bodyPr rtlCol="0" anchor="ctr"/>
-          <a:lstStyle/>
-          <a:p>
-            <a:pPr algn="ctr"/>
-            <a:endParaRPr lang="en-US"/>
-          </a:p>
-        </p:txBody>
-      </p:sp>
-      <p:pic>
-        <p:nvPicPr>
           <p:cNvPr id="7" name="Picture 6">
             <a:extLst>
               <a:ext uri="{FF2B5EF4-FFF2-40B4-BE49-F238E27FC236}">
@@ -7766,7 +6968,7 @@
           <p:nvPr/>
         </p:nvPicPr>
         <p:blipFill>
-          <a:blip r:embed="rId4"/>
+          <a:blip r:embed="rId3"/>
           <a:srcRect r="-4" b="1371"/>
           <a:stretch>
             <a:fillRect/>
@@ -7774,131 +6976,14 @@
         </p:blipFill>
         <p:spPr>
           <a:xfrm>
-            <a:off x="7363157" y="691546"/>
-            <a:ext cx="4134177" cy="2874505"/>
+            <a:off x="7271962" y="691545"/>
+            <a:ext cx="4391095" cy="3053141"/>
           </a:xfrm>
           <a:prstGeom prst="rect">
             <a:avLst/>
           </a:prstGeom>
         </p:spPr>
       </p:pic>
-      <p:sp useBgFill="1">
-        <p:nvSpPr>
-          <p:cNvPr id="32" name="Rectangle 31">
-            <a:extLst>
-              <a:ext uri="{FF2B5EF4-FFF2-40B4-BE49-F238E27FC236}">
-                <a16:creationId xmlns:a16="http://schemas.microsoft.com/office/drawing/2014/main" id="{2F30281D-F374-46E3-8F88-0539BF4C6B42}"/>
-              </a:ext>
-              <a:ext uri="{C183D7F6-B498-43B3-948B-1728B52AA6E4}">
-                <adec:decorative xmlns:adec="http://schemas.microsoft.com/office/drawing/2017/decorative" val="1"/>
-              </a:ext>
-            </a:extLst>
-          </p:cNvPr>
-          <p:cNvSpPr>
-            <a:spLocks noGrp="1" noRot="1" noChangeAspect="1" noMove="1" noResize="1" noEditPoints="1" noAdjustHandles="1" noChangeArrowheads="1" noChangeShapeType="1" noTextEdit="1"/>
-          </p:cNvSpPr>
-          <p:nvPr>
-            <p:extLst>
-              <p:ext uri="{386F3935-93C4-4BCD-93E2-E3B085C9AB24}">
-                <p16:designElem xmlns:p16="http://schemas.microsoft.com/office/powerpoint/2015/main" val="1"/>
-              </p:ext>
-            </p:extLst>
-          </p:nvPr>
-        </p:nvSpPr>
-        <p:spPr>
-          <a:xfrm>
-            <a:off x="0" y="4256974"/>
-            <a:ext cx="12188952" cy="2601025"/>
-          </a:xfrm>
-          <a:prstGeom prst="rect">
-            <a:avLst/>
-          </a:prstGeom>
-          <a:ln>
-            <a:noFill/>
-          </a:ln>
-          <a:effectLst/>
-        </p:spPr>
-        <p:style>
-          <a:lnRef idx="2">
-            <a:schemeClr val="accent1">
-              <a:shade val="50000"/>
-            </a:schemeClr>
-          </a:lnRef>
-          <a:fillRef idx="1">
-            <a:schemeClr val="accent1"/>
-          </a:fillRef>
-          <a:effectRef idx="0">
-            <a:schemeClr val="accent1"/>
-          </a:effectRef>
-          <a:fontRef idx="minor">
-            <a:schemeClr val="lt1"/>
-          </a:fontRef>
-        </p:style>
-        <p:txBody>
-          <a:bodyPr rtlCol="0" anchor="ctr"/>
-          <a:lstStyle/>
-          <a:p>
-            <a:pPr algn="ctr"/>
-            <a:endParaRPr lang="en-US"/>
-          </a:p>
-        </p:txBody>
-      </p:sp>
-      <p:cxnSp>
-        <p:nvCxnSpPr>
-          <p:cNvPr id="34" name="Straight Connector 33">
-            <a:extLst>
-              <a:ext uri="{FF2B5EF4-FFF2-40B4-BE49-F238E27FC236}">
-                <a16:creationId xmlns:a16="http://schemas.microsoft.com/office/drawing/2014/main" id="{42F03C21-1D0E-4C89-92F7-3E1EBE4DEF01}"/>
-              </a:ext>
-              <a:ext uri="{C183D7F6-B498-43B3-948B-1728B52AA6E4}">
-                <adec:decorative xmlns:adec="http://schemas.microsoft.com/office/drawing/2017/decorative" val="1"/>
-              </a:ext>
-            </a:extLst>
-          </p:cNvPr>
-          <p:cNvCxnSpPr>
-            <a:cxnSpLocks noGrp="1" noRot="1" noChangeAspect="1" noMove="1" noResize="1" noEditPoints="1" noAdjustHandles="1" noChangeArrowheads="1" noChangeShapeType="1"/>
-          </p:cNvCxnSpPr>
-          <p:nvPr>
-            <p:extLst>
-              <p:ext uri="{386F3935-93C4-4BCD-93E2-E3B085C9AB24}">
-                <p16:designElem xmlns:p16="http://schemas.microsoft.com/office/powerpoint/2015/main" val="1"/>
-              </p:ext>
-            </p:extLst>
-          </p:nvPr>
-        </p:nvCxnSpPr>
-        <p:spPr>
-          <a:xfrm>
-            <a:off x="-12134" y="4491323"/>
-            <a:ext cx="12201086" cy="0"/>
-          </a:xfrm>
-          <a:prstGeom prst="line">
-            <a:avLst/>
-          </a:prstGeom>
-          <a:ln w="82550">
-            <a:solidFill>
-              <a:schemeClr val="tx1">
-                <a:lumMod val="50000"/>
-                <a:lumOff val="50000"/>
-              </a:schemeClr>
-            </a:solidFill>
-            <a:miter lim="800000"/>
-          </a:ln>
-        </p:spPr>
-        <p:style>
-          <a:lnRef idx="2">
-            <a:schemeClr val="accent1"/>
-          </a:lnRef>
-          <a:fillRef idx="0">
-            <a:schemeClr val="accent1"/>
-          </a:fillRef>
-          <a:effectRef idx="1">
-            <a:schemeClr val="accent1"/>
-          </a:effectRef>
-          <a:fontRef idx="minor">
-            <a:schemeClr val="tx1"/>
-          </a:fontRef>
-        </p:style>
-      </p:cxnSp>
       <p:sp>
         <p:nvSpPr>
           <p:cNvPr id="2" name="Title 1">
@@ -7932,74 +7017,6 @@
               <a:rPr lang="en-US" sz="6800"/>
               <a:t>Database</a:t>
             </a:r>
-          </a:p>
-        </p:txBody>
-      </p:sp>
-      <p:sp>
-        <p:nvSpPr>
-          <p:cNvPr id="36" name="5-Point Star 8">
-            <a:extLst>
-              <a:ext uri="{FF2B5EF4-FFF2-40B4-BE49-F238E27FC236}">
-                <a16:creationId xmlns:a16="http://schemas.microsoft.com/office/drawing/2014/main" id="{FEDA77FB-4261-4A1C-9163-834A8A74DCCA}"/>
-              </a:ext>
-              <a:ext uri="{C183D7F6-B498-43B3-948B-1728B52AA6E4}">
-                <adec:decorative xmlns:adec="http://schemas.microsoft.com/office/drawing/2017/decorative" val="1"/>
-              </a:ext>
-            </a:extLst>
-          </p:cNvPr>
-          <p:cNvSpPr>
-            <a:spLocks noGrp="1" noRot="1" noChangeAspect="1" noMove="1" noResize="1" noEditPoints="1" noAdjustHandles="1" noChangeArrowheads="1" noChangeShapeType="1" noTextEdit="1"/>
-          </p:cNvSpPr>
-          <p:nvPr>
-            <p:extLst>
-              <p:ext uri="{386F3935-93C4-4BCD-93E2-E3B085C9AB24}">
-                <p16:designElem xmlns:p16="http://schemas.microsoft.com/office/powerpoint/2015/main" val="1"/>
-              </p:ext>
-            </p:extLst>
-          </p:nvPr>
-        </p:nvSpPr>
-        <p:spPr>
-          <a:xfrm>
-            <a:off x="5903408" y="6388943"/>
-            <a:ext cx="373049" cy="373049"/>
-          </a:xfrm>
-          <a:prstGeom prst="star5">
-            <a:avLst>
-              <a:gd name="adj" fmla="val 26693"/>
-              <a:gd name="hf" fmla="val 105146"/>
-              <a:gd name="vf" fmla="val 110557"/>
-            </a:avLst>
-          </a:prstGeom>
-          <a:solidFill>
-            <a:schemeClr val="tx1">
-              <a:lumMod val="65000"/>
-              <a:lumOff val="35000"/>
-              <a:alpha val="40000"/>
-            </a:schemeClr>
-          </a:solidFill>
-          <a:ln>
-            <a:noFill/>
-          </a:ln>
-        </p:spPr>
-        <p:style>
-          <a:lnRef idx="1">
-            <a:schemeClr val="accent1"/>
-          </a:lnRef>
-          <a:fillRef idx="3">
-            <a:schemeClr val="accent1"/>
-          </a:fillRef>
-          <a:effectRef idx="2">
-            <a:schemeClr val="accent1"/>
-          </a:effectRef>
-          <a:fontRef idx="minor">
-            <a:schemeClr val="lt1"/>
-          </a:fontRef>
-        </p:style>
-        <p:txBody>
-          <a:bodyPr/>
-          <a:lstStyle/>
-          <a:p>
-            <a:endParaRPr lang="en-CA"/>
           </a:p>
         </p:txBody>
       </p:sp>
@@ -8018,7 +7035,7 @@
           <p:nvPr/>
         </p:nvPicPr>
         <p:blipFill>
-          <a:blip r:embed="rId5"/>
+          <a:blip r:embed="rId4"/>
           <a:srcRect t="10030" r="3" b="3"/>
           <a:stretch>
             <a:fillRect/>
@@ -8026,8 +7043,8 @@
         </p:blipFill>
         <p:spPr>
           <a:xfrm>
-            <a:off x="685912" y="691545"/>
-            <a:ext cx="6553801" cy="2874505"/>
+            <a:off x="163398" y="691545"/>
+            <a:ext cx="6961087" cy="3053141"/>
           </a:xfrm>
           <a:prstGeom prst="rect">
             <a:avLst/>
@@ -8085,713 +7102,6 @@
           <a:chExt cx="0" cy="0"/>
         </a:xfrm>
       </p:grpSpPr>
-      <p:pic>
-        <p:nvPicPr>
-          <p:cNvPr id="43" name="Picture 42">
-            <a:extLst>
-              <a:ext uri="{FF2B5EF4-FFF2-40B4-BE49-F238E27FC236}">
-                <a16:creationId xmlns:a16="http://schemas.microsoft.com/office/drawing/2014/main" id="{E0CC70BA-3B27-4D37-9E55-9F566B3FB491}"/>
-              </a:ext>
-              <a:ext uri="{C183D7F6-B498-43B3-948B-1728B52AA6E4}">
-                <adec:decorative xmlns:adec="http://schemas.microsoft.com/office/drawing/2017/decorative" val="1"/>
-              </a:ext>
-            </a:extLst>
-          </p:cNvPr>
-          <p:cNvPicPr>
-            <a:picLocks noGrp="1" noRot="1" noChangeAspect="1" noMove="1" noResize="1" noEditPoints="1" noAdjustHandles="1" noChangeArrowheads="1" noChangeShapeType="1" noCrop="1"/>
-          </p:cNvPicPr>
-          <p:nvPr>
-            <p:extLst>
-              <p:ext uri="{386F3935-93C4-4BCD-93E2-E3B085C9AB24}">
-                <p16:designElem xmlns:p16="http://schemas.microsoft.com/office/powerpoint/2015/main" val="1"/>
-              </p:ext>
-            </p:extLst>
-          </p:nvPr>
-        </p:nvPicPr>
-        <p:blipFill>
-          <a:blip r:embed="rId3">
-            <a:extLst>
-              <a:ext uri="{28A0092B-C50C-407E-A947-70E740481C1C}">
-                <a14:useLocalDpi xmlns:a14="http://schemas.microsoft.com/office/drawing/2010/main" val="0"/>
-              </a:ext>
-            </a:extLst>
-          </a:blip>
-          <a:stretch>
-            <a:fillRect/>
-          </a:stretch>
-        </p:blipFill>
-        <p:spPr>
-          <a:xfrm>
-            <a:off x="0" y="0"/>
-            <a:ext cx="12192000" cy="6858000"/>
-          </a:xfrm>
-          <a:prstGeom prst="rect">
-            <a:avLst/>
-          </a:prstGeom>
-        </p:spPr>
-      </p:pic>
-      <p:sp useBgFill="1">
-        <p:nvSpPr>
-          <p:cNvPr id="44" name="Freeform 11">
-            <a:extLst>
-              <a:ext uri="{FF2B5EF4-FFF2-40B4-BE49-F238E27FC236}">
-                <a16:creationId xmlns:a16="http://schemas.microsoft.com/office/drawing/2014/main" id="{8E54E5FE-6A50-43B2-979B-BE2474F45D05}"/>
-              </a:ext>
-              <a:ext uri="{C183D7F6-B498-43B3-948B-1728B52AA6E4}">
-                <adec:decorative xmlns:adec="http://schemas.microsoft.com/office/drawing/2017/decorative" val="1"/>
-              </a:ext>
-            </a:extLst>
-          </p:cNvPr>
-          <p:cNvSpPr>
-            <a:spLocks noGrp="1" noRot="1" noChangeAspect="1" noMove="1" noResize="1" noEditPoints="1" noAdjustHandles="1" noChangeArrowheads="1" noChangeShapeType="1" noTextEdit="1"/>
-          </p:cNvSpPr>
-          <p:nvPr>
-            <p:extLst>
-              <p:ext uri="{386F3935-93C4-4BCD-93E2-E3B085C9AB24}">
-                <p16:designElem xmlns:p16="http://schemas.microsoft.com/office/powerpoint/2015/main" val="1"/>
-              </p:ext>
-            </p:extLst>
-          </p:nvPr>
-        </p:nvSpPr>
-        <p:spPr>
-          <a:xfrm>
-            <a:off x="-15875" y="0"/>
-            <a:ext cx="11683810" cy="6588125"/>
-          </a:xfrm>
-          <a:custGeom>
-            <a:avLst/>
-            <a:gdLst/>
-            <a:ahLst/>
-            <a:cxnLst/>
-            <a:rect l="l" t="t" r="r" b="b"/>
-            <a:pathLst>
-              <a:path w="11683810" h="6588125">
-                <a:moveTo>
-                  <a:pt x="0" y="0"/>
-                </a:moveTo>
-                <a:lnTo>
-                  <a:pt x="11318691" y="0"/>
-                </a:lnTo>
-                <a:lnTo>
-                  <a:pt x="11683810" y="5976938"/>
-                </a:lnTo>
-                <a:lnTo>
-                  <a:pt x="15875" y="6588125"/>
-                </a:lnTo>
-                <a:cubicBezTo>
-                  <a:pt x="10583" y="4386792"/>
-                  <a:pt x="5292" y="2185458"/>
-                  <a:pt x="0" y="0"/>
-                </a:cubicBezTo>
-                <a:close/>
-              </a:path>
-            </a:pathLst>
-          </a:custGeom>
-          <a:ln>
-            <a:noFill/>
-          </a:ln>
-          <a:effectLst>
-            <a:outerShdw blurRad="101600" dist="152400" dir="4380000" algn="tl" rotWithShape="0">
-              <a:srgbClr val="000000">
-                <a:alpha val="43000"/>
-              </a:srgbClr>
-            </a:outerShdw>
-          </a:effectLst>
-        </p:spPr>
-        <p:style>
-          <a:lnRef idx="1">
-            <a:schemeClr val="accent1"/>
-          </a:lnRef>
-          <a:fillRef idx="3">
-            <a:schemeClr val="accent1"/>
-          </a:fillRef>
-          <a:effectRef idx="2">
-            <a:schemeClr val="accent1"/>
-          </a:effectRef>
-          <a:fontRef idx="minor">
-            <a:schemeClr val="lt1"/>
-          </a:fontRef>
-        </p:style>
-        <p:txBody>
-          <a:bodyPr/>
-          <a:lstStyle/>
-          <a:p>
-            <a:endParaRPr lang="en-CA"/>
-          </a:p>
-        </p:txBody>
-      </p:sp>
-      <p:sp>
-        <p:nvSpPr>
-          <p:cNvPr id="45" name="Freeform 13">
-            <a:extLst>
-              <a:ext uri="{FF2B5EF4-FFF2-40B4-BE49-F238E27FC236}">
-                <a16:creationId xmlns:a16="http://schemas.microsoft.com/office/drawing/2014/main" id="{1732545C-0790-47A1-B809-8A25315860D8}"/>
-              </a:ext>
-              <a:ext uri="{C183D7F6-B498-43B3-948B-1728B52AA6E4}">
-                <adec:decorative xmlns:adec="http://schemas.microsoft.com/office/drawing/2017/decorative" val="1"/>
-              </a:ext>
-            </a:extLst>
-          </p:cNvPr>
-          <p:cNvSpPr>
-            <a:spLocks noGrp="1" noRot="1" noChangeAspect="1" noMove="1" noResize="1" noEditPoints="1" noAdjustHandles="1" noChangeArrowheads="1" noChangeShapeType="1" noTextEdit="1"/>
-          </p:cNvSpPr>
-          <p:nvPr>
-            <p:extLst>
-              <p:ext uri="{386F3935-93C4-4BCD-93E2-E3B085C9AB24}">
-                <p16:designElem xmlns:p16="http://schemas.microsoft.com/office/powerpoint/2015/main" val="1"/>
-              </p:ext>
-            </p:extLst>
-          </p:nvPr>
-        </p:nvSpPr>
-        <p:spPr>
-          <a:xfrm>
-            <a:off x="0" y="4282257"/>
-            <a:ext cx="11329257" cy="2028845"/>
-          </a:xfrm>
-          <a:custGeom>
-            <a:avLst/>
-            <a:gdLst/>
-            <a:ahLst/>
-            <a:cxnLst/>
-            <a:rect l="l" t="t" r="r" b="b"/>
-            <a:pathLst>
-              <a:path w="11329257" h="2028845">
-                <a:moveTo>
-                  <a:pt x="0" y="588520"/>
-                </a:moveTo>
-                <a:lnTo>
-                  <a:pt x="11244075" y="0"/>
-                </a:lnTo>
-                <a:lnTo>
-                  <a:pt x="11329257" y="1424838"/>
-                </a:lnTo>
-                <a:lnTo>
-                  <a:pt x="0" y="2028845"/>
-                </a:lnTo>
-                <a:lnTo>
-                  <a:pt x="0" y="588520"/>
-                </a:lnTo>
-                <a:close/>
-              </a:path>
-            </a:pathLst>
-          </a:custGeom>
-          <a:gradFill flip="none" rotWithShape="1">
-            <a:gsLst>
-              <a:gs pos="34000">
-                <a:schemeClr val="accent1"/>
-              </a:gs>
-              <a:gs pos="100000">
-                <a:schemeClr val="accent1">
-                  <a:lumMod val="50000"/>
-                </a:schemeClr>
-              </a:gs>
-            </a:gsLst>
-            <a:path path="circle">
-              <a:fillToRect l="50000" t="50000" r="50000" b="50000"/>
-            </a:path>
-            <a:tileRect/>
-          </a:gradFill>
-          <a:ln>
-            <a:noFill/>
-          </a:ln>
-        </p:spPr>
-        <p:style>
-          <a:lnRef idx="1">
-            <a:schemeClr val="accent1"/>
-          </a:lnRef>
-          <a:fillRef idx="3">
-            <a:schemeClr val="accent1"/>
-          </a:fillRef>
-          <a:effectRef idx="2">
-            <a:schemeClr val="accent1"/>
-          </a:effectRef>
-          <a:fontRef idx="minor">
-            <a:schemeClr val="lt1"/>
-          </a:fontRef>
-        </p:style>
-        <p:txBody>
-          <a:bodyPr/>
-          <a:lstStyle/>
-          <a:p>
-            <a:endParaRPr lang="en-CA"/>
-          </a:p>
-        </p:txBody>
-      </p:sp>
-      <p:sp>
-        <p:nvSpPr>
-          <p:cNvPr id="46" name="Freeform 25">
-            <a:extLst>
-              <a:ext uri="{FF2B5EF4-FFF2-40B4-BE49-F238E27FC236}">
-                <a16:creationId xmlns:a16="http://schemas.microsoft.com/office/drawing/2014/main" id="{22C9706F-5320-4C8E-91AE-1A9025E9CAD2}"/>
-              </a:ext>
-              <a:ext uri="{C183D7F6-B498-43B3-948B-1728B52AA6E4}">
-                <adec:decorative xmlns:adec="http://schemas.microsoft.com/office/drawing/2017/decorative" val="1"/>
-              </a:ext>
-            </a:extLst>
-          </p:cNvPr>
-          <p:cNvSpPr>
-            <a:spLocks noGrp="1" noRot="1" noChangeAspect="1" noMove="1" noResize="1" noEditPoints="1" noAdjustHandles="1" noChangeArrowheads="1" noChangeShapeType="1" noTextEdit="1"/>
-          </p:cNvSpPr>
-          <p:nvPr>
-            <p:extLst>
-              <p:ext uri="{386F3935-93C4-4BCD-93E2-E3B085C9AB24}">
-                <p16:designElem xmlns:p16="http://schemas.microsoft.com/office/powerpoint/2015/main" val="1"/>
-              </p:ext>
-            </p:extLst>
-          </p:nvPr>
-        </p:nvSpPr>
-        <p:spPr>
-          <a:xfrm>
-            <a:off x="0" y="0"/>
-            <a:ext cx="8719579" cy="456877"/>
-          </a:xfrm>
-          <a:custGeom>
-            <a:avLst/>
-            <a:gdLst/>
-            <a:ahLst/>
-            <a:cxnLst/>
-            <a:rect l="l" t="t" r="r" b="b"/>
-            <a:pathLst>
-              <a:path w="8719579" h="456877">
-                <a:moveTo>
-                  <a:pt x="0" y="0"/>
-                </a:moveTo>
-                <a:lnTo>
-                  <a:pt x="8719579" y="0"/>
-                </a:lnTo>
-                <a:lnTo>
-                  <a:pt x="0" y="456877"/>
-                </a:lnTo>
-                <a:lnTo>
-                  <a:pt x="0" y="0"/>
-                </a:lnTo>
-                <a:close/>
-              </a:path>
-            </a:pathLst>
-          </a:custGeom>
-          <a:gradFill flip="none" rotWithShape="1">
-            <a:gsLst>
-              <a:gs pos="34000">
-                <a:schemeClr val="accent1"/>
-              </a:gs>
-              <a:gs pos="100000">
-                <a:schemeClr val="accent1">
-                  <a:lumMod val="50000"/>
-                </a:schemeClr>
-              </a:gs>
-            </a:gsLst>
-            <a:path path="circle">
-              <a:fillToRect l="50000" t="50000" r="50000" b="50000"/>
-            </a:path>
-            <a:tileRect/>
-          </a:gradFill>
-          <a:ln>
-            <a:noFill/>
-          </a:ln>
-        </p:spPr>
-        <p:style>
-          <a:lnRef idx="1">
-            <a:schemeClr val="accent1"/>
-          </a:lnRef>
-          <a:fillRef idx="3">
-            <a:schemeClr val="accent1"/>
-          </a:fillRef>
-          <a:effectRef idx="2">
-            <a:schemeClr val="accent1"/>
-          </a:effectRef>
-          <a:fontRef idx="minor">
-            <a:schemeClr val="lt1"/>
-          </a:fontRef>
-        </p:style>
-        <p:txBody>
-          <a:bodyPr/>
-          <a:lstStyle/>
-          <a:p>
-            <a:endParaRPr lang="en-CA"/>
-          </a:p>
-        </p:txBody>
-      </p:sp>
-      <p:sp>
-        <p:nvSpPr>
-          <p:cNvPr id="47" name="Freeform 14">
-            <a:extLst>
-              <a:ext uri="{FF2B5EF4-FFF2-40B4-BE49-F238E27FC236}">
-                <a16:creationId xmlns:a16="http://schemas.microsoft.com/office/drawing/2014/main" id="{307E1BB0-6022-40FB-8C25-E20C51DC5470}"/>
-              </a:ext>
-              <a:ext uri="{C183D7F6-B498-43B3-948B-1728B52AA6E4}">
-                <adec:decorative xmlns:adec="http://schemas.microsoft.com/office/drawing/2017/decorative" val="1"/>
-              </a:ext>
-            </a:extLst>
-          </p:cNvPr>
-          <p:cNvSpPr>
-            <a:spLocks noGrp="1" noRot="1" noChangeAspect="1" noMove="1" noResize="1" noEditPoints="1" noAdjustHandles="1" noChangeArrowheads="1" noChangeShapeType="1" noTextEdit="1"/>
-          </p:cNvSpPr>
-          <p:nvPr>
-            <p:extLst>
-              <p:ext uri="{386F3935-93C4-4BCD-93E2-E3B085C9AB24}">
-                <p16:designElem xmlns:p16="http://schemas.microsoft.com/office/powerpoint/2015/main" val="1"/>
-              </p:ext>
-            </p:extLst>
-          </p:nvPr>
-        </p:nvSpPr>
-        <p:spPr>
-          <a:xfrm rot="21420000">
-            <a:off x="-161800" y="293317"/>
-            <a:ext cx="11367116" cy="5751804"/>
-          </a:xfrm>
-          <a:custGeom>
-            <a:avLst/>
-            <a:gdLst/>
-            <a:ahLst/>
-            <a:cxnLst/>
-            <a:rect l="l" t="t" r="r" b="b"/>
-            <a:pathLst>
-              <a:path w="11367116" h="5751804">
-                <a:moveTo>
-                  <a:pt x="11346705" y="0"/>
-                </a:moveTo>
-                <a:cubicBezTo>
-                  <a:pt x="11353509" y="1915114"/>
-                  <a:pt x="11360312" y="3830229"/>
-                  <a:pt x="11367116" y="5745343"/>
-                </a:cubicBezTo>
-                <a:lnTo>
-                  <a:pt x="0" y="5751804"/>
-                </a:lnTo>
-              </a:path>
-            </a:pathLst>
-          </a:custGeom>
-          <a:ln w="82550">
-            <a:solidFill>
-              <a:schemeClr val="tx1">
-                <a:lumMod val="50000"/>
-                <a:lumOff val="50000"/>
-              </a:schemeClr>
-            </a:solidFill>
-            <a:miter lim="800000"/>
-          </a:ln>
-        </p:spPr>
-        <p:style>
-          <a:lnRef idx="2">
-            <a:schemeClr val="accent1"/>
-          </a:lnRef>
-          <a:fillRef idx="0">
-            <a:schemeClr val="accent1"/>
-          </a:fillRef>
-          <a:effectRef idx="1">
-            <a:schemeClr val="accent1"/>
-          </a:effectRef>
-          <a:fontRef idx="minor">
-            <a:schemeClr val="tx1"/>
-          </a:fontRef>
-        </p:style>
-        <p:txBody>
-          <a:bodyPr/>
-          <a:lstStyle/>
-          <a:p>
-            <a:endParaRPr lang="en-CA"/>
-          </a:p>
-        </p:txBody>
-      </p:sp>
-      <p:sp>
-        <p:nvSpPr>
-          <p:cNvPr id="48" name="5-Point Star 24">
-            <a:extLst>
-              <a:ext uri="{FF2B5EF4-FFF2-40B4-BE49-F238E27FC236}">
-                <a16:creationId xmlns:a16="http://schemas.microsoft.com/office/drawing/2014/main" id="{0FA51A0F-B103-49AB-BD7A-A4545B98AC42}"/>
-              </a:ext>
-              <a:ext uri="{C183D7F6-B498-43B3-948B-1728B52AA6E4}">
-                <adec:decorative xmlns:adec="http://schemas.microsoft.com/office/drawing/2017/decorative" val="1"/>
-              </a:ext>
-            </a:extLst>
-          </p:cNvPr>
-          <p:cNvSpPr>
-            <a:spLocks noGrp="1" noRot="1" noChangeAspect="1" noMove="1" noResize="1" noEditPoints="1" noAdjustHandles="1" noChangeArrowheads="1" noChangeShapeType="1" noTextEdit="1"/>
-          </p:cNvSpPr>
-          <p:nvPr>
-            <p:extLst>
-              <p:ext uri="{386F3935-93C4-4BCD-93E2-E3B085C9AB24}">
-                <p16:designElem xmlns:p16="http://schemas.microsoft.com/office/powerpoint/2015/main" val="1"/>
-              </p:ext>
-            </p:extLst>
-          </p:nvPr>
-        </p:nvSpPr>
-        <p:spPr>
-          <a:xfrm rot="21420000">
-            <a:off x="4221385" y="5111356"/>
-            <a:ext cx="515386" cy="515386"/>
-          </a:xfrm>
-          <a:prstGeom prst="star5">
-            <a:avLst>
-              <a:gd name="adj" fmla="val 26693"/>
-              <a:gd name="hf" fmla="val 105146"/>
-              <a:gd name="vf" fmla="val 110557"/>
-            </a:avLst>
-          </a:prstGeom>
-          <a:solidFill>
-            <a:schemeClr val="tx1">
-              <a:alpha val="40000"/>
-            </a:schemeClr>
-          </a:solidFill>
-          <a:ln>
-            <a:noFill/>
-          </a:ln>
-        </p:spPr>
-        <p:style>
-          <a:lnRef idx="1">
-            <a:schemeClr val="accent1"/>
-          </a:lnRef>
-          <a:fillRef idx="3">
-            <a:schemeClr val="accent1"/>
-          </a:fillRef>
-          <a:effectRef idx="2">
-            <a:schemeClr val="accent1"/>
-          </a:effectRef>
-          <a:fontRef idx="minor">
-            <a:schemeClr val="lt1"/>
-          </a:fontRef>
-        </p:style>
-        <p:txBody>
-          <a:bodyPr/>
-          <a:lstStyle/>
-          <a:p>
-            <a:endParaRPr lang="en-CA"/>
-          </a:p>
-        </p:txBody>
-      </p:sp>
-      <p:pic>
-        <p:nvPicPr>
-          <p:cNvPr id="49" name="Picture 48">
-            <a:extLst>
-              <a:ext uri="{FF2B5EF4-FFF2-40B4-BE49-F238E27FC236}">
-                <a16:creationId xmlns:a16="http://schemas.microsoft.com/office/drawing/2014/main" id="{30DA633B-92EB-4B60-9923-569561004480}"/>
-              </a:ext>
-              <a:ext uri="{C183D7F6-B498-43B3-948B-1728B52AA6E4}">
-                <adec:decorative xmlns:adec="http://schemas.microsoft.com/office/drawing/2017/decorative" val="1"/>
-              </a:ext>
-            </a:extLst>
-          </p:cNvPr>
-          <p:cNvPicPr>
-            <a:picLocks noGrp="1" noRot="1" noChangeAspect="1" noMove="1" noResize="1" noEditPoints="1" noAdjustHandles="1" noChangeArrowheads="1" noChangeShapeType="1" noCrop="1"/>
-          </p:cNvPicPr>
-          <p:nvPr>
-            <p:extLst>
-              <p:ext uri="{386F3935-93C4-4BCD-93E2-E3B085C9AB24}">
-                <p16:designElem xmlns:p16="http://schemas.microsoft.com/office/powerpoint/2015/main" val="1"/>
-              </p:ext>
-            </p:extLst>
-          </p:nvPr>
-        </p:nvPicPr>
-        <p:blipFill>
-          <a:blip r:embed="rId3">
-            <a:extLst>
-              <a:ext uri="{28A0092B-C50C-407E-A947-70E740481C1C}">
-                <a14:useLocalDpi xmlns:a14="http://schemas.microsoft.com/office/drawing/2010/main" val="0"/>
-              </a:ext>
-            </a:extLst>
-          </a:blip>
-          <a:stretch>
-            <a:fillRect/>
-          </a:stretch>
-        </p:blipFill>
-        <p:spPr>
-          <a:xfrm>
-            <a:off x="0" y="0"/>
-            <a:ext cx="12192000" cy="6858000"/>
-          </a:xfrm>
-          <a:prstGeom prst="rect">
-            <a:avLst/>
-          </a:prstGeom>
-        </p:spPr>
-      </p:pic>
-      <p:sp>
-        <p:nvSpPr>
-          <p:cNvPr id="50" name="Rectangle 49">
-            <a:extLst>
-              <a:ext uri="{FF2B5EF4-FFF2-40B4-BE49-F238E27FC236}">
-                <a16:creationId xmlns:a16="http://schemas.microsoft.com/office/drawing/2014/main" id="{6448A3C3-EB01-4B07-A230-2273FBEA562A}"/>
-              </a:ext>
-              <a:ext uri="{C183D7F6-B498-43B3-948B-1728B52AA6E4}">
-                <adec:decorative xmlns:adec="http://schemas.microsoft.com/office/drawing/2017/decorative" val="1"/>
-              </a:ext>
-            </a:extLst>
-          </p:cNvPr>
-          <p:cNvSpPr>
-            <a:spLocks noGrp="1" noRot="1" noChangeAspect="1" noMove="1" noResize="1" noEditPoints="1" noAdjustHandles="1" noChangeArrowheads="1" noChangeShapeType="1" noTextEdit="1"/>
-          </p:cNvSpPr>
-          <p:nvPr>
-            <p:extLst>
-              <p:ext uri="{386F3935-93C4-4BCD-93E2-E3B085C9AB24}">
-                <p16:designElem xmlns:p16="http://schemas.microsoft.com/office/powerpoint/2015/main" val="1"/>
-              </p:ext>
-            </p:extLst>
-          </p:nvPr>
-        </p:nvSpPr>
-        <p:spPr>
-          <a:xfrm>
-            <a:off x="466954" y="457201"/>
-            <a:ext cx="11261749" cy="3343894"/>
-          </a:xfrm>
-          <a:prstGeom prst="rect">
-            <a:avLst/>
-          </a:prstGeom>
-          <a:solidFill>
-            <a:schemeClr val="bg1"/>
-          </a:solidFill>
-          <a:ln w="57150" cmpd="thinThick">
-            <a:noFill/>
-            <a:miter lim="800000"/>
-          </a:ln>
-          <a:effectLst>
-            <a:outerShdw blurRad="63500" sx="102000" sy="102000" algn="ctr" rotWithShape="0">
-              <a:prstClr val="black">
-                <a:alpha val="40000"/>
-              </a:prstClr>
-            </a:outerShdw>
-          </a:effectLst>
-        </p:spPr>
-        <p:style>
-          <a:lnRef idx="2">
-            <a:schemeClr val="accent1">
-              <a:shade val="50000"/>
-            </a:schemeClr>
-          </a:lnRef>
-          <a:fillRef idx="1">
-            <a:schemeClr val="accent1"/>
-          </a:fillRef>
-          <a:effectRef idx="0">
-            <a:schemeClr val="accent1"/>
-          </a:effectRef>
-          <a:fontRef idx="minor">
-            <a:schemeClr val="lt1"/>
-          </a:fontRef>
-        </p:style>
-        <p:txBody>
-          <a:bodyPr rtlCol="0" anchor="ctr"/>
-          <a:lstStyle/>
-          <a:p>
-            <a:pPr algn="ctr"/>
-            <a:endParaRPr lang="en-US"/>
-          </a:p>
-        </p:txBody>
-      </p:sp>
-      <p:sp useBgFill="1">
-        <p:nvSpPr>
-          <p:cNvPr id="30" name="Rectangle 29">
-            <a:extLst>
-              <a:ext uri="{FF2B5EF4-FFF2-40B4-BE49-F238E27FC236}">
-                <a16:creationId xmlns:a16="http://schemas.microsoft.com/office/drawing/2014/main" id="{093D7238-9B57-4D5E-B8A1-6E9AB7ED47A4}"/>
-              </a:ext>
-              <a:ext uri="{C183D7F6-B498-43B3-948B-1728B52AA6E4}">
-                <adec:decorative xmlns:adec="http://schemas.microsoft.com/office/drawing/2017/decorative" val="1"/>
-              </a:ext>
-            </a:extLst>
-          </p:cNvPr>
-          <p:cNvSpPr>
-            <a:spLocks noGrp="1" noRot="1" noChangeAspect="1" noMove="1" noResize="1" noEditPoints="1" noAdjustHandles="1" noChangeArrowheads="1" noChangeShapeType="1" noTextEdit="1"/>
-          </p:cNvSpPr>
-          <p:nvPr>
-            <p:extLst>
-              <p:ext uri="{386F3935-93C4-4BCD-93E2-E3B085C9AB24}">
-                <p16:designElem xmlns:p16="http://schemas.microsoft.com/office/powerpoint/2015/main" val="1"/>
-              </p:ext>
-            </p:extLst>
-          </p:nvPr>
-        </p:nvSpPr>
-        <p:spPr>
-          <a:xfrm>
-            <a:off x="0" y="4256974"/>
-            <a:ext cx="12188952" cy="2601025"/>
-          </a:xfrm>
-          <a:prstGeom prst="rect">
-            <a:avLst/>
-          </a:prstGeom>
-          <a:ln>
-            <a:noFill/>
-          </a:ln>
-          <a:effectLst/>
-        </p:spPr>
-        <p:style>
-          <a:lnRef idx="2">
-            <a:schemeClr val="accent1">
-              <a:shade val="50000"/>
-            </a:schemeClr>
-          </a:lnRef>
-          <a:fillRef idx="1">
-            <a:schemeClr val="accent1"/>
-          </a:fillRef>
-          <a:effectRef idx="0">
-            <a:schemeClr val="accent1"/>
-          </a:effectRef>
-          <a:fontRef idx="minor">
-            <a:schemeClr val="lt1"/>
-          </a:fontRef>
-        </p:style>
-        <p:txBody>
-          <a:bodyPr rtlCol="0" anchor="ctr"/>
-          <a:lstStyle/>
-          <a:p>
-            <a:pPr algn="ctr"/>
-            <a:endParaRPr lang="en-US"/>
-          </a:p>
-        </p:txBody>
-      </p:sp>
-      <p:cxnSp>
-        <p:nvCxnSpPr>
-          <p:cNvPr id="32" name="Straight Connector 31">
-            <a:extLst>
-              <a:ext uri="{FF2B5EF4-FFF2-40B4-BE49-F238E27FC236}">
-                <a16:creationId xmlns:a16="http://schemas.microsoft.com/office/drawing/2014/main" id="{E626346F-26E6-4664-AE9F-F1C8E542CA37}"/>
-              </a:ext>
-              <a:ext uri="{C183D7F6-B498-43B3-948B-1728B52AA6E4}">
-                <adec:decorative xmlns:adec="http://schemas.microsoft.com/office/drawing/2017/decorative" val="1"/>
-              </a:ext>
-            </a:extLst>
-          </p:cNvPr>
-          <p:cNvCxnSpPr>
-            <a:cxnSpLocks noGrp="1" noRot="1" noChangeAspect="1" noMove="1" noResize="1" noEditPoints="1" noAdjustHandles="1" noChangeArrowheads="1" noChangeShapeType="1"/>
-          </p:cNvCxnSpPr>
-          <p:nvPr>
-            <p:extLst>
-              <p:ext uri="{386F3935-93C4-4BCD-93E2-E3B085C9AB24}">
-                <p16:designElem xmlns:p16="http://schemas.microsoft.com/office/powerpoint/2015/main" val="1"/>
-              </p:ext>
-            </p:extLst>
-          </p:nvPr>
-        </p:nvCxnSpPr>
-        <p:spPr>
-          <a:xfrm>
-            <a:off x="-12134" y="4491323"/>
-            <a:ext cx="12201086" cy="0"/>
-          </a:xfrm>
-          <a:prstGeom prst="line">
-            <a:avLst/>
-          </a:prstGeom>
-          <a:ln w="82550">
-            <a:solidFill>
-              <a:schemeClr val="tx1">
-                <a:lumMod val="50000"/>
-                <a:lumOff val="50000"/>
-              </a:schemeClr>
-            </a:solidFill>
-            <a:miter lim="800000"/>
-          </a:ln>
-        </p:spPr>
-        <p:style>
-          <a:lnRef idx="2">
-            <a:schemeClr val="accent1"/>
-          </a:lnRef>
-          <a:fillRef idx="0">
-            <a:schemeClr val="accent1"/>
-          </a:fillRef>
-          <a:effectRef idx="1">
-            <a:schemeClr val="accent1"/>
-          </a:effectRef>
-          <a:fontRef idx="minor">
-            <a:schemeClr val="tx1"/>
-          </a:fontRef>
-        </p:style>
-      </p:cxnSp>
       <p:sp>
         <p:nvSpPr>
           <p:cNvPr id="2" name="Title 1">
@@ -8810,89 +7120,21 @@
         </p:nvSpPr>
         <p:spPr>
           <a:xfrm>
-            <a:off x="685912" y="4714814"/>
-            <a:ext cx="10818199" cy="1075211"/>
+            <a:off x="827427" y="5649686"/>
+            <a:ext cx="10014745" cy="843340"/>
           </a:xfrm>
         </p:spPr>
         <p:txBody>
           <a:bodyPr vert="horz" lIns="91440" tIns="45720" rIns="91440" bIns="45720" rtlCol="0" anchor="b">
-            <a:normAutofit/>
+            <a:normAutofit fontScale="90000"/>
           </a:bodyPr>
           <a:lstStyle/>
           <a:p>
             <a:pPr algn="ctr"/>
             <a:r>
-              <a:rPr lang="en-US" sz="6800"/>
+              <a:rPr lang="en-US" sz="6800" dirty="0"/>
               <a:t>Mobile App</a:t>
             </a:r>
-          </a:p>
-        </p:txBody>
-      </p:sp>
-      <p:sp>
-        <p:nvSpPr>
-          <p:cNvPr id="34" name="5-Point Star 8">
-            <a:extLst>
-              <a:ext uri="{FF2B5EF4-FFF2-40B4-BE49-F238E27FC236}">
-                <a16:creationId xmlns:a16="http://schemas.microsoft.com/office/drawing/2014/main" id="{3A4C8985-32CF-4C63-AA39-3A8629E7E38E}"/>
-              </a:ext>
-              <a:ext uri="{C183D7F6-B498-43B3-948B-1728B52AA6E4}">
-                <adec:decorative xmlns:adec="http://schemas.microsoft.com/office/drawing/2017/decorative" val="1"/>
-              </a:ext>
-            </a:extLst>
-          </p:cNvPr>
-          <p:cNvSpPr>
-            <a:spLocks noGrp="1" noRot="1" noChangeAspect="1" noMove="1" noResize="1" noEditPoints="1" noAdjustHandles="1" noChangeArrowheads="1" noChangeShapeType="1" noTextEdit="1"/>
-          </p:cNvSpPr>
-          <p:nvPr>
-            <p:extLst>
-              <p:ext uri="{386F3935-93C4-4BCD-93E2-E3B085C9AB24}">
-                <p16:designElem xmlns:p16="http://schemas.microsoft.com/office/powerpoint/2015/main" val="1"/>
-              </p:ext>
-            </p:extLst>
-          </p:nvPr>
-        </p:nvSpPr>
-        <p:spPr>
-          <a:xfrm>
-            <a:off x="5903408" y="6388943"/>
-            <a:ext cx="373049" cy="373049"/>
-          </a:xfrm>
-          <a:prstGeom prst="star5">
-            <a:avLst>
-              <a:gd name="adj" fmla="val 26693"/>
-              <a:gd name="hf" fmla="val 105146"/>
-              <a:gd name="vf" fmla="val 110557"/>
-            </a:avLst>
-          </a:prstGeom>
-          <a:solidFill>
-            <a:schemeClr val="tx1">
-              <a:lumMod val="65000"/>
-              <a:lumOff val="35000"/>
-              <a:alpha val="40000"/>
-            </a:schemeClr>
-          </a:solidFill>
-          <a:ln>
-            <a:noFill/>
-          </a:ln>
-        </p:spPr>
-        <p:style>
-          <a:lnRef idx="1">
-            <a:schemeClr val="accent1"/>
-          </a:lnRef>
-          <a:fillRef idx="3">
-            <a:schemeClr val="accent1"/>
-          </a:fillRef>
-          <a:effectRef idx="2">
-            <a:schemeClr val="accent1"/>
-          </a:effectRef>
-          <a:fontRef idx="minor">
-            <a:schemeClr val="lt1"/>
-          </a:fontRef>
-        </p:style>
-        <p:txBody>
-          <a:bodyPr/>
-          <a:lstStyle/>
-          <a:p>
-            <a:endParaRPr lang="en-CA"/>
           </a:p>
         </p:txBody>
       </p:sp>
@@ -8911,15 +7153,15 @@
           <p:nvPr/>
         </p:nvPicPr>
         <p:blipFill>
-          <a:blip r:embed="rId4"/>
+          <a:blip r:embed="rId3"/>
           <a:stretch>
             <a:fillRect/>
           </a:stretch>
         </p:blipFill>
         <p:spPr>
           <a:xfrm>
-            <a:off x="1573814" y="691545"/>
-            <a:ext cx="1724702" cy="2874505"/>
+            <a:off x="827427" y="364974"/>
+            <a:ext cx="2856672" cy="4761123"/>
           </a:xfrm>
           <a:prstGeom prst="rect">
             <a:avLst/>
@@ -8941,15 +7183,15 @@
           <p:nvPr/>
         </p:nvPicPr>
         <p:blipFill>
-          <a:blip r:embed="rId5"/>
+          <a:blip r:embed="rId4"/>
           <a:stretch>
             <a:fillRect/>
           </a:stretch>
         </p:blipFill>
         <p:spPr>
           <a:xfrm>
-            <a:off x="5167142" y="691545"/>
-            <a:ext cx="1846869" cy="2874505"/>
+            <a:off x="4164812" y="392196"/>
+            <a:ext cx="3041531" cy="4733901"/>
           </a:xfrm>
           <a:prstGeom prst="rect">
             <a:avLst/>
@@ -8971,15 +7213,15 @@
           <p:nvPr/>
         </p:nvPicPr>
         <p:blipFill>
-          <a:blip r:embed="rId6"/>
+          <a:blip r:embed="rId5"/>
           <a:stretch>
             <a:fillRect/>
           </a:stretch>
         </p:blipFill>
         <p:spPr>
           <a:xfrm>
-            <a:off x="9041876" y="691546"/>
-            <a:ext cx="1394134" cy="2874505"/>
+            <a:off x="7924799" y="364974"/>
+            <a:ext cx="2721429" cy="4690960"/>
           </a:xfrm>
           <a:prstGeom prst="rect">
             <a:avLst/>
@@ -9039,280 +7281,6 @@
       </p:grpSpPr>
       <p:sp>
         <p:nvSpPr>
-          <p:cNvPr id="8" name="Freeform: Shape 7">
-            <a:extLst>
-              <a:ext uri="{FF2B5EF4-FFF2-40B4-BE49-F238E27FC236}">
-                <a16:creationId xmlns:a16="http://schemas.microsoft.com/office/drawing/2014/main" id="{66809B23-EC40-425A-B89A-F9CE4F06316B}"/>
-              </a:ext>
-              <a:ext uri="{C183D7F6-B498-43B3-948B-1728B52AA6E4}">
-                <adec:decorative xmlns:adec="http://schemas.microsoft.com/office/drawing/2017/decorative" val="1"/>
-              </a:ext>
-            </a:extLst>
-          </p:cNvPr>
-          <p:cNvSpPr>
-            <a:spLocks noGrp="1" noRot="1" noChangeAspect="1" noMove="1" noResize="1" noEditPoints="1" noAdjustHandles="1" noChangeArrowheads="1" noChangeShapeType="1" noTextEdit="1"/>
-          </p:cNvSpPr>
-          <p:nvPr>
-            <p:extLst>
-              <p:ext uri="{386F3935-93C4-4BCD-93E2-E3B085C9AB24}">
-                <p16:designElem xmlns:p16="http://schemas.microsoft.com/office/powerpoint/2015/main" val="1"/>
-              </p:ext>
-            </p:extLst>
-          </p:nvPr>
-        </p:nvSpPr>
-        <p:spPr>
-          <a:xfrm>
-            <a:off x="0" y="1"/>
-            <a:ext cx="12192001" cy="6857999"/>
-          </a:xfrm>
-          <a:custGeom>
-            <a:avLst/>
-            <a:gdLst>
-              <a:gd name="connsiteX0" fmla="*/ 3 w 11647715"/>
-              <a:gd name="connsiteY0" fmla="*/ 0 h 2634343"/>
-              <a:gd name="connsiteX1" fmla="*/ 11647715 w 11647715"/>
-              <a:gd name="connsiteY1" fmla="*/ 0 h 2634343"/>
-              <a:gd name="connsiteX2" fmla="*/ 11647715 w 11647715"/>
-              <a:gd name="connsiteY2" fmla="*/ 2634343 h 2634343"/>
-              <a:gd name="connsiteX3" fmla="*/ 3 w 11647715"/>
-              <a:gd name="connsiteY3" fmla="*/ 2634343 h 2634343"/>
-              <a:gd name="connsiteX4" fmla="*/ 3 w 11647715"/>
-              <a:gd name="connsiteY4" fmla="*/ 1533667 h 2634343"/>
-              <a:gd name="connsiteX5" fmla="*/ 0 w 11647715"/>
-              <a:gd name="connsiteY5" fmla="*/ 1533667 h 2634343"/>
-              <a:gd name="connsiteX6" fmla="*/ 0 w 11647715"/>
-              <a:gd name="connsiteY6" fmla="*/ 980400 h 2634343"/>
-              <a:gd name="connsiteX7" fmla="*/ 3 w 11647715"/>
-              <a:gd name="connsiteY7" fmla="*/ 980400 h 2634343"/>
-            </a:gdLst>
-            <a:ahLst/>
-            <a:cxnLst>
-              <a:cxn ang="0">
-                <a:pos x="connsiteX0" y="connsiteY0"/>
-              </a:cxn>
-              <a:cxn ang="0">
-                <a:pos x="connsiteX1" y="connsiteY1"/>
-              </a:cxn>
-              <a:cxn ang="0">
-                <a:pos x="connsiteX2" y="connsiteY2"/>
-              </a:cxn>
-              <a:cxn ang="0">
-                <a:pos x="connsiteX3" y="connsiteY3"/>
-              </a:cxn>
-              <a:cxn ang="0">
-                <a:pos x="connsiteX4" y="connsiteY4"/>
-              </a:cxn>
-              <a:cxn ang="0">
-                <a:pos x="connsiteX5" y="connsiteY5"/>
-              </a:cxn>
-              <a:cxn ang="0">
-                <a:pos x="connsiteX6" y="connsiteY6"/>
-              </a:cxn>
-              <a:cxn ang="0">
-                <a:pos x="connsiteX7" y="connsiteY7"/>
-              </a:cxn>
-            </a:cxnLst>
-            <a:rect l="l" t="t" r="r" b="b"/>
-            <a:pathLst>
-              <a:path w="11647715" h="2634343">
-                <a:moveTo>
-                  <a:pt x="3" y="0"/>
-                </a:moveTo>
-                <a:lnTo>
-                  <a:pt x="11647715" y="0"/>
-                </a:lnTo>
-                <a:lnTo>
-                  <a:pt x="11647715" y="2634343"/>
-                </a:lnTo>
-                <a:lnTo>
-                  <a:pt x="3" y="2634343"/>
-                </a:lnTo>
-                <a:lnTo>
-                  <a:pt x="3" y="1533667"/>
-                </a:lnTo>
-                <a:lnTo>
-                  <a:pt x="0" y="1533667"/>
-                </a:lnTo>
-                <a:lnTo>
-                  <a:pt x="0" y="980400"/>
-                </a:lnTo>
-                <a:lnTo>
-                  <a:pt x="3" y="980400"/>
-                </a:lnTo>
-                <a:close/>
-              </a:path>
-            </a:pathLst>
-          </a:custGeom>
-          <a:gradFill flip="none" rotWithShape="1">
-            <a:gsLst>
-              <a:gs pos="34000">
-                <a:schemeClr val="accent1"/>
-              </a:gs>
-              <a:gs pos="100000">
-                <a:schemeClr val="accent1">
-                  <a:lumMod val="50000"/>
-                </a:schemeClr>
-              </a:gs>
-            </a:gsLst>
-            <a:path path="circle">
-              <a:fillToRect l="50000" t="50000" r="50000" b="50000"/>
-            </a:path>
-            <a:tileRect/>
-          </a:gradFill>
-          <a:ln>
-            <a:noFill/>
-          </a:ln>
-        </p:spPr>
-        <p:style>
-          <a:lnRef idx="1">
-            <a:schemeClr val="accent1"/>
-          </a:lnRef>
-          <a:fillRef idx="3">
-            <a:schemeClr val="accent1"/>
-          </a:fillRef>
-          <a:effectRef idx="2">
-            <a:schemeClr val="accent1"/>
-          </a:effectRef>
-          <a:fontRef idx="minor">
-            <a:schemeClr val="lt1"/>
-          </a:fontRef>
-        </p:style>
-        <p:txBody>
-          <a:bodyPr/>
-          <a:lstStyle/>
-          <a:p>
-            <a:endParaRPr lang="en-CA"/>
-          </a:p>
-        </p:txBody>
-      </p:sp>
-      <p:sp useBgFill="1">
-        <p:nvSpPr>
-          <p:cNvPr id="10" name="Freeform: Shape 9">
-            <a:extLst>
-              <a:ext uri="{FF2B5EF4-FFF2-40B4-BE49-F238E27FC236}">
-                <a16:creationId xmlns:a16="http://schemas.microsoft.com/office/drawing/2014/main" id="{A601F395-3079-4179-84BA-6654D9F8258F}"/>
-              </a:ext>
-              <a:ext uri="{C183D7F6-B498-43B3-948B-1728B52AA6E4}">
-                <adec:decorative xmlns:adec="http://schemas.microsoft.com/office/drawing/2017/decorative" val="1"/>
-              </a:ext>
-            </a:extLst>
-          </p:cNvPr>
-          <p:cNvSpPr>
-            <a:spLocks noGrp="1" noRot="1" noChangeAspect="1" noMove="1" noResize="1" noEditPoints="1" noAdjustHandles="1" noChangeArrowheads="1" noChangeShapeType="1" noTextEdit="1"/>
-          </p:cNvSpPr>
-          <p:nvPr>
-            <p:extLst>
-              <p:ext uri="{386F3935-93C4-4BCD-93E2-E3B085C9AB24}">
-                <p16:designElem xmlns:p16="http://schemas.microsoft.com/office/powerpoint/2015/main" val="1"/>
-              </p:ext>
-            </p:extLst>
-          </p:nvPr>
-        </p:nvSpPr>
-        <p:spPr>
-          <a:xfrm>
-            <a:off x="643466" y="643467"/>
-            <a:ext cx="10905067" cy="5571066"/>
-          </a:xfrm>
-          <a:custGeom>
-            <a:avLst/>
-            <a:gdLst>
-              <a:gd name="connsiteX0" fmla="*/ 0 w 8130198"/>
-              <a:gd name="connsiteY0" fmla="*/ 0 h 6857999"/>
-              <a:gd name="connsiteX1" fmla="*/ 7241014 w 8130198"/>
-              <a:gd name="connsiteY1" fmla="*/ 0 h 6857999"/>
-              <a:gd name="connsiteX2" fmla="*/ 8130198 w 8130198"/>
-              <a:gd name="connsiteY2" fmla="*/ 0 h 6857999"/>
-              <a:gd name="connsiteX3" fmla="*/ 8130198 w 8130198"/>
-              <a:gd name="connsiteY3" fmla="*/ 6857999 h 6857999"/>
-              <a:gd name="connsiteX4" fmla="*/ 0 w 8130198"/>
-              <a:gd name="connsiteY4" fmla="*/ 6857999 h 6857999"/>
-              <a:gd name="connsiteX5" fmla="*/ 0 w 8130198"/>
-              <a:gd name="connsiteY5" fmla="*/ 6375361 h 6857999"/>
-            </a:gdLst>
-            <a:ahLst/>
-            <a:cxnLst>
-              <a:cxn ang="0">
-                <a:pos x="connsiteX0" y="connsiteY0"/>
-              </a:cxn>
-              <a:cxn ang="0">
-                <a:pos x="connsiteX1" y="connsiteY1"/>
-              </a:cxn>
-              <a:cxn ang="0">
-                <a:pos x="connsiteX2" y="connsiteY2"/>
-              </a:cxn>
-              <a:cxn ang="0">
-                <a:pos x="connsiteX3" y="connsiteY3"/>
-              </a:cxn>
-              <a:cxn ang="0">
-                <a:pos x="connsiteX4" y="connsiteY4"/>
-              </a:cxn>
-              <a:cxn ang="0">
-                <a:pos x="connsiteX5" y="connsiteY5"/>
-              </a:cxn>
-            </a:cxnLst>
-            <a:rect l="l" t="t" r="r" b="b"/>
-            <a:pathLst>
-              <a:path w="8130198" h="6857999">
-                <a:moveTo>
-                  <a:pt x="0" y="0"/>
-                </a:moveTo>
-                <a:lnTo>
-                  <a:pt x="7241014" y="0"/>
-                </a:lnTo>
-                <a:lnTo>
-                  <a:pt x="8130198" y="0"/>
-                </a:lnTo>
-                <a:lnTo>
-                  <a:pt x="8130198" y="6857999"/>
-                </a:lnTo>
-                <a:lnTo>
-                  <a:pt x="0" y="6857999"/>
-                </a:lnTo>
-                <a:lnTo>
-                  <a:pt x="0" y="6375361"/>
-                </a:lnTo>
-                <a:close/>
-              </a:path>
-            </a:pathLst>
-          </a:custGeom>
-          <a:ln w="50800" cap="sq">
-            <a:solidFill>
-              <a:srgbClr val="7F7F7F"/>
-            </a:solidFill>
-            <a:miter lim="800000"/>
-          </a:ln>
-          <a:effectLst>
-            <a:outerShdw blurRad="101600" dist="152400" dir="4380000" algn="t" rotWithShape="0">
-              <a:prstClr val="black">
-                <a:alpha val="43000"/>
-              </a:prstClr>
-            </a:outerShdw>
-          </a:effectLst>
-        </p:spPr>
-        <p:style>
-          <a:lnRef idx="1">
-            <a:schemeClr val="accent1"/>
-          </a:lnRef>
-          <a:fillRef idx="3">
-            <a:schemeClr val="accent1"/>
-          </a:fillRef>
-          <a:effectRef idx="2">
-            <a:schemeClr val="accent1"/>
-          </a:effectRef>
-          <a:fontRef idx="minor">
-            <a:schemeClr val="lt1"/>
-          </a:fontRef>
-        </p:style>
-        <p:txBody>
-          <a:bodyPr/>
-          <a:lstStyle/>
-          <a:p>
-            <a:endParaRPr lang="en-CA"/>
-          </a:p>
-        </p:txBody>
-      </p:sp>
-      <p:sp>
-        <p:nvSpPr>
           <p:cNvPr id="2" name="Title 1">
             <a:extLst>
               <a:ext uri="{FF2B5EF4-FFF2-40B4-BE49-F238E27FC236}">
@@ -9329,7 +7297,7 @@
         </p:nvSpPr>
         <p:spPr>
           <a:xfrm>
-            <a:off x="1286933" y="1061660"/>
+            <a:off x="1286933" y="305761"/>
             <a:ext cx="9618133" cy="1043108"/>
           </a:xfrm>
         </p:spPr>
@@ -9341,7 +7309,7 @@
           <a:p>
             <a:pPr algn="ctr"/>
             <a:r>
-              <a:rPr lang="en-CA" sz="4800"/>
+              <a:rPr lang="en-CA" sz="4800" dirty="0"/>
               <a:t>Demonstration Setup</a:t>
             </a:r>
           </a:p>
@@ -9365,13 +7333,13 @@
         </p:nvSpPr>
         <p:spPr>
           <a:xfrm>
-            <a:off x="1286933" y="2226681"/>
-            <a:ext cx="9618133" cy="3586290"/>
+            <a:off x="1286933" y="1469571"/>
+            <a:ext cx="9618133" cy="4343400"/>
           </a:xfrm>
         </p:spPr>
         <p:txBody>
           <a:bodyPr>
-            <a:normAutofit/>
+            <a:normAutofit lnSpcReduction="10000"/>
           </a:bodyPr>
           <a:lstStyle/>
           <a:p>
@@ -9381,7 +7349,7 @@
               </a:lnSpc>
             </a:pPr>
             <a:r>
-              <a:rPr lang="en-CA" sz="1800">
+              <a:rPr lang="en-CA" sz="1800" dirty="0">
                 <a:solidFill>
                   <a:schemeClr val="tx1">
                     <a:lumMod val="85000"/>
@@ -9389,32 +7357,10 @@
                   </a:schemeClr>
                 </a:solidFill>
               </a:rPr>
-              <a:t>We are using Anthonys Raspberry pi</a:t>
-            </a:r>
-          </a:p>
-          <a:p>
-            <a:pPr>
-              <a:lnSpc>
-                <a:spcPct val="110000"/>
-              </a:lnSpc>
-            </a:pPr>
-            <a:endParaRPr lang="en-CA" sz="1800">
-              <a:solidFill>
-                <a:schemeClr val="tx1">
-                  <a:lumMod val="85000"/>
-                  <a:lumOff val="15000"/>
-                </a:schemeClr>
-              </a:solidFill>
-            </a:endParaRPr>
-          </a:p>
-          <a:p>
-            <a:pPr>
-              <a:lnSpc>
-                <a:spcPct val="110000"/>
-              </a:lnSpc>
-            </a:pPr>
-            <a:r>
-              <a:rPr lang="en-CA" sz="1800">
+              <a:t>We are using Anthonys Raspberry pi, the power supply and cables will be provide by Anthony </a:t>
+            </a:r>
+            <a:r>
+              <a:rPr lang="en-CA" sz="1800" dirty="0" err="1">
                 <a:solidFill>
                   <a:schemeClr val="tx1">
                     <a:lumMod val="85000"/>
@@ -9422,7 +7368,18 @@
                   </a:schemeClr>
                 </a:solidFill>
               </a:rPr>
-              <a:t>For a demonstration a user will have already created an account through our app</a:t>
+              <a:t>aswell</a:t>
+            </a:r>
+            <a:r>
+              <a:rPr lang="en-CA" sz="1800" dirty="0">
+                <a:solidFill>
+                  <a:schemeClr val="tx1">
+                    <a:lumMod val="85000"/>
+                    <a:lumOff val="15000"/>
+                  </a:schemeClr>
+                </a:solidFill>
+              </a:rPr>
+              <a:t>.</a:t>
             </a:r>
           </a:p>
           <a:p>
@@ -9432,7 +7389,83 @@
               </a:lnSpc>
             </a:pPr>
             <a:r>
-              <a:rPr lang="en-CA" sz="1800">
+              <a:rPr lang="en-CA" sz="1800" dirty="0">
+                <a:solidFill>
+                  <a:schemeClr val="tx1">
+                    <a:lumMod val="85000"/>
+                    <a:lumOff val="15000"/>
+                  </a:schemeClr>
+                </a:solidFill>
+              </a:rPr>
+              <a:t>We will be using Ngoc Le’s laptop for our demonstration, </a:t>
+            </a:r>
+          </a:p>
+          <a:p>
+            <a:pPr>
+              <a:lnSpc>
+                <a:spcPct val="110000"/>
+              </a:lnSpc>
+            </a:pPr>
+            <a:r>
+              <a:rPr lang="en-CA" sz="1800" dirty="0">
+                <a:solidFill>
+                  <a:schemeClr val="tx1">
+                    <a:lumMod val="85000"/>
+                    <a:lumOff val="15000"/>
+                  </a:schemeClr>
+                </a:solidFill>
+              </a:rPr>
+              <a:t>The </a:t>
+            </a:r>
+            <a:r>
+              <a:rPr lang="en-CA" sz="1800" dirty="0" err="1">
+                <a:solidFill>
+                  <a:schemeClr val="tx1">
+                    <a:lumMod val="85000"/>
+                    <a:lumOff val="15000"/>
+                  </a:schemeClr>
+                </a:solidFill>
+              </a:rPr>
+              <a:t>pcB’s</a:t>
+            </a:r>
+            <a:r>
+              <a:rPr lang="en-CA" sz="1800" dirty="0">
+                <a:solidFill>
+                  <a:schemeClr val="tx1">
+                    <a:lumMod val="85000"/>
+                    <a:lumOff val="15000"/>
+                  </a:schemeClr>
+                </a:solidFill>
+              </a:rPr>
+              <a:t> being used in our project are Tyler’s And Ngocs created last semester in our Hardware production Class</a:t>
+            </a:r>
+          </a:p>
+          <a:p>
+            <a:pPr>
+              <a:lnSpc>
+                <a:spcPct val="110000"/>
+              </a:lnSpc>
+            </a:pPr>
+            <a:r>
+              <a:rPr lang="en-CA" sz="1800" dirty="0">
+                <a:solidFill>
+                  <a:schemeClr val="tx1">
+                    <a:lumMod val="85000"/>
+                    <a:lumOff val="15000"/>
+                  </a:schemeClr>
+                </a:solidFill>
+              </a:rPr>
+              <a:t>For our demonstration a user will have already created an account through our app</a:t>
+            </a:r>
+          </a:p>
+          <a:p>
+            <a:pPr>
+              <a:lnSpc>
+                <a:spcPct val="110000"/>
+              </a:lnSpc>
+            </a:pPr>
+            <a:r>
+              <a:rPr lang="en-CA" sz="1800" dirty="0">
                 <a:solidFill>
                   <a:schemeClr val="tx1">
                     <a:lumMod val="85000"/>
@@ -9450,7 +7483,7 @@
               </a:lnSpc>
             </a:pPr>
             <a:r>
-              <a:rPr lang="en-CA" sz="1800">
+              <a:rPr lang="en-CA" sz="1800" dirty="0">
                 <a:solidFill>
                   <a:schemeClr val="tx1">
                     <a:lumMod val="85000"/>
@@ -9458,7 +7491,29 @@
                   </a:schemeClr>
                 </a:solidFill>
               </a:rPr>
-              <a:t>A user will use the keypad to interact wit the menu through the Zio Oled,</a:t>
+              <a:t>A user will use the keypad to interact wit the menu through the Zio </a:t>
+            </a:r>
+            <a:r>
+              <a:rPr lang="en-CA" sz="1800" dirty="0" err="1">
+                <a:solidFill>
+                  <a:schemeClr val="tx1">
+                    <a:lumMod val="85000"/>
+                    <a:lumOff val="15000"/>
+                  </a:schemeClr>
+                </a:solidFill>
+              </a:rPr>
+              <a:t>Oled</a:t>
+            </a:r>
+            <a:r>
+              <a:rPr lang="en-CA" sz="1800" dirty="0">
+                <a:solidFill>
+                  <a:schemeClr val="tx1">
+                    <a:lumMod val="85000"/>
+                    <a:lumOff val="15000"/>
+                  </a:schemeClr>
+                </a:solidFill>
+              </a:rPr>
+              <a:t>,</a:t>
             </a:r>
           </a:p>
           <a:p>
@@ -9468,7 +7523,7 @@
               </a:lnSpc>
             </a:pPr>
             <a:r>
-              <a:rPr lang="en-CA" sz="1800">
+              <a:rPr lang="en-CA" sz="1800" dirty="0">
                 <a:solidFill>
                   <a:schemeClr val="tx1">
                     <a:lumMod val="85000"/>
@@ -9485,7 +7540,7 @@
                 <a:spcPct val="110000"/>
               </a:lnSpc>
             </a:pPr>
-            <a:endParaRPr lang="en-CA" sz="1800">
+            <a:endParaRPr lang="en-CA" sz="1800" dirty="0">
               <a:solidFill>
                 <a:schemeClr val="tx1">
                   <a:lumMod val="85000"/>
@@ -9501,7 +7556,7 @@
               </a:lnSpc>
             </a:pPr>
             <a:r>
-              <a:rPr lang="en-CA" sz="1800">
+              <a:rPr lang="en-CA" sz="1800" dirty="0">
                 <a:solidFill>
                   <a:schemeClr val="tx1">
                     <a:lumMod val="85000"/>
@@ -9509,7 +7564,7 @@
                   </a:schemeClr>
                 </a:solidFill>
               </a:rPr>
-              <a:t>Our product is a proof-of-concept prototype.</a:t>
+              <a:t>Our Project is a proof-of-concept prototype.</a:t>
             </a:r>
           </a:p>
           <a:p>
@@ -9518,7 +7573,7 @@
                 <a:spcPct val="110000"/>
               </a:lnSpc>
             </a:pPr>
-            <a:endParaRPr lang="en-CA" sz="1800">
+            <a:endParaRPr lang="en-CA" sz="1800" dirty="0">
               <a:solidFill>
                 <a:schemeClr val="tx1">
                   <a:lumMod val="85000"/>
@@ -9580,715 +7635,6 @@
           <a:chExt cx="0" cy="0"/>
         </a:xfrm>
       </p:grpSpPr>
-      <p:pic>
-        <p:nvPicPr>
-          <p:cNvPr id="8" name="Picture 7">
-            <a:extLst>
-              <a:ext uri="{FF2B5EF4-FFF2-40B4-BE49-F238E27FC236}">
-                <a16:creationId xmlns:a16="http://schemas.microsoft.com/office/drawing/2014/main" id="{01A8CDCA-EC58-40B4-9F17-A7B613A32F58}"/>
-              </a:ext>
-              <a:ext uri="{C183D7F6-B498-43B3-948B-1728B52AA6E4}">
-                <adec:decorative xmlns:adec="http://schemas.microsoft.com/office/drawing/2017/decorative" val="1"/>
-              </a:ext>
-            </a:extLst>
-          </p:cNvPr>
-          <p:cNvPicPr>
-            <a:picLocks noGrp="1" noRot="1" noChangeAspect="1" noMove="1" noResize="1" noEditPoints="1" noAdjustHandles="1" noChangeArrowheads="1" noChangeShapeType="1" noCrop="1"/>
-          </p:cNvPicPr>
-          <p:nvPr>
-            <p:extLst>
-              <p:ext uri="{386F3935-93C4-4BCD-93E2-E3B085C9AB24}">
-                <p16:designElem xmlns:p16="http://schemas.microsoft.com/office/powerpoint/2015/main" val="1"/>
-              </p:ext>
-            </p:extLst>
-          </p:nvPr>
-        </p:nvPicPr>
-        <p:blipFill>
-          <a:blip r:embed="rId3">
-            <a:extLst>
-              <a:ext uri="{28A0092B-C50C-407E-A947-70E740481C1C}">
-                <a14:useLocalDpi xmlns:a14="http://schemas.microsoft.com/office/drawing/2010/main" val="0"/>
-              </a:ext>
-            </a:extLst>
-          </a:blip>
-          <a:stretch>
-            <a:fillRect/>
-          </a:stretch>
-        </p:blipFill>
-        <p:spPr>
-          <a:xfrm>
-            <a:off x="0" y="0"/>
-            <a:ext cx="12192000" cy="6858000"/>
-          </a:xfrm>
-          <a:prstGeom prst="rect">
-            <a:avLst/>
-          </a:prstGeom>
-        </p:spPr>
-      </p:pic>
-      <p:sp useBgFill="1">
-        <p:nvSpPr>
-          <p:cNvPr id="10" name="Freeform 11">
-            <a:extLst>
-              <a:ext uri="{FF2B5EF4-FFF2-40B4-BE49-F238E27FC236}">
-                <a16:creationId xmlns:a16="http://schemas.microsoft.com/office/drawing/2014/main" id="{DBC44137-B240-488D-B88F-9D266FACAA4F}"/>
-              </a:ext>
-              <a:ext uri="{C183D7F6-B498-43B3-948B-1728B52AA6E4}">
-                <adec:decorative xmlns:adec="http://schemas.microsoft.com/office/drawing/2017/decorative" val="1"/>
-              </a:ext>
-            </a:extLst>
-          </p:cNvPr>
-          <p:cNvSpPr>
-            <a:spLocks noGrp="1" noRot="1" noChangeAspect="1" noMove="1" noResize="1" noEditPoints="1" noAdjustHandles="1" noChangeArrowheads="1" noChangeShapeType="1" noTextEdit="1"/>
-          </p:cNvSpPr>
-          <p:nvPr>
-            <p:extLst>
-              <p:ext uri="{386F3935-93C4-4BCD-93E2-E3B085C9AB24}">
-                <p16:designElem xmlns:p16="http://schemas.microsoft.com/office/powerpoint/2015/main" val="1"/>
-              </p:ext>
-            </p:extLst>
-          </p:nvPr>
-        </p:nvSpPr>
-        <p:spPr>
-          <a:xfrm>
-            <a:off x="-15875" y="0"/>
-            <a:ext cx="11683810" cy="6588125"/>
-          </a:xfrm>
-          <a:custGeom>
-            <a:avLst/>
-            <a:gdLst/>
-            <a:ahLst/>
-            <a:cxnLst/>
-            <a:rect l="l" t="t" r="r" b="b"/>
-            <a:pathLst>
-              <a:path w="11683810" h="6588125">
-                <a:moveTo>
-                  <a:pt x="0" y="0"/>
-                </a:moveTo>
-                <a:lnTo>
-                  <a:pt x="11318691" y="0"/>
-                </a:lnTo>
-                <a:lnTo>
-                  <a:pt x="11683810" y="5976938"/>
-                </a:lnTo>
-                <a:lnTo>
-                  <a:pt x="15875" y="6588125"/>
-                </a:lnTo>
-                <a:cubicBezTo>
-                  <a:pt x="10583" y="4386792"/>
-                  <a:pt x="5292" y="2185458"/>
-                  <a:pt x="0" y="0"/>
-                </a:cubicBezTo>
-                <a:close/>
-              </a:path>
-            </a:pathLst>
-          </a:custGeom>
-          <a:ln>
-            <a:noFill/>
-          </a:ln>
-          <a:effectLst>
-            <a:outerShdw blurRad="101600" dist="152400" dir="4380000" algn="tl" rotWithShape="0">
-              <a:srgbClr val="000000">
-                <a:alpha val="43000"/>
-              </a:srgbClr>
-            </a:outerShdw>
-          </a:effectLst>
-        </p:spPr>
-        <p:style>
-          <a:lnRef idx="1">
-            <a:schemeClr val="accent1"/>
-          </a:lnRef>
-          <a:fillRef idx="3">
-            <a:schemeClr val="accent1"/>
-          </a:fillRef>
-          <a:effectRef idx="2">
-            <a:schemeClr val="accent1"/>
-          </a:effectRef>
-          <a:fontRef idx="minor">
-            <a:schemeClr val="lt1"/>
-          </a:fontRef>
-        </p:style>
-        <p:txBody>
-          <a:bodyPr/>
-          <a:lstStyle/>
-          <a:p>
-            <a:endParaRPr lang="en-CA"/>
-          </a:p>
-        </p:txBody>
-      </p:sp>
-      <p:sp>
-        <p:nvSpPr>
-          <p:cNvPr id="12" name="Freeform 13">
-            <a:extLst>
-              <a:ext uri="{FF2B5EF4-FFF2-40B4-BE49-F238E27FC236}">
-                <a16:creationId xmlns:a16="http://schemas.microsoft.com/office/drawing/2014/main" id="{70FFA344-365C-4944-848F-8B966C335657}"/>
-              </a:ext>
-              <a:ext uri="{C183D7F6-B498-43B3-948B-1728B52AA6E4}">
-                <adec:decorative xmlns:adec="http://schemas.microsoft.com/office/drawing/2017/decorative" val="1"/>
-              </a:ext>
-            </a:extLst>
-          </p:cNvPr>
-          <p:cNvSpPr>
-            <a:spLocks noGrp="1" noRot="1" noChangeAspect="1" noMove="1" noResize="1" noEditPoints="1" noAdjustHandles="1" noChangeArrowheads="1" noChangeShapeType="1" noTextEdit="1"/>
-          </p:cNvSpPr>
-          <p:nvPr>
-            <p:extLst>
-              <p:ext uri="{386F3935-93C4-4BCD-93E2-E3B085C9AB24}">
-                <p16:designElem xmlns:p16="http://schemas.microsoft.com/office/powerpoint/2015/main" val="1"/>
-              </p:ext>
-            </p:extLst>
-          </p:nvPr>
-        </p:nvSpPr>
-        <p:spPr>
-          <a:xfrm>
-            <a:off x="0" y="4282257"/>
-            <a:ext cx="11329257" cy="2028845"/>
-          </a:xfrm>
-          <a:custGeom>
-            <a:avLst/>
-            <a:gdLst/>
-            <a:ahLst/>
-            <a:cxnLst/>
-            <a:rect l="l" t="t" r="r" b="b"/>
-            <a:pathLst>
-              <a:path w="11329257" h="2028845">
-                <a:moveTo>
-                  <a:pt x="0" y="588520"/>
-                </a:moveTo>
-                <a:lnTo>
-                  <a:pt x="11244075" y="0"/>
-                </a:lnTo>
-                <a:lnTo>
-                  <a:pt x="11329257" y="1424838"/>
-                </a:lnTo>
-                <a:lnTo>
-                  <a:pt x="0" y="2028845"/>
-                </a:lnTo>
-                <a:lnTo>
-                  <a:pt x="0" y="588520"/>
-                </a:lnTo>
-                <a:close/>
-              </a:path>
-            </a:pathLst>
-          </a:custGeom>
-          <a:gradFill flip="none" rotWithShape="1">
-            <a:gsLst>
-              <a:gs pos="34000">
-                <a:schemeClr val="accent1"/>
-              </a:gs>
-              <a:gs pos="100000">
-                <a:schemeClr val="accent1">
-                  <a:lumMod val="50000"/>
-                </a:schemeClr>
-              </a:gs>
-            </a:gsLst>
-            <a:path path="circle">
-              <a:fillToRect l="50000" t="50000" r="50000" b="50000"/>
-            </a:path>
-            <a:tileRect/>
-          </a:gradFill>
-          <a:ln>
-            <a:noFill/>
-          </a:ln>
-        </p:spPr>
-        <p:style>
-          <a:lnRef idx="1">
-            <a:schemeClr val="accent1"/>
-          </a:lnRef>
-          <a:fillRef idx="3">
-            <a:schemeClr val="accent1"/>
-          </a:fillRef>
-          <a:effectRef idx="2">
-            <a:schemeClr val="accent1"/>
-          </a:effectRef>
-          <a:fontRef idx="minor">
-            <a:schemeClr val="lt1"/>
-          </a:fontRef>
-        </p:style>
-        <p:txBody>
-          <a:bodyPr/>
-          <a:lstStyle/>
-          <a:p>
-            <a:endParaRPr lang="en-CA"/>
-          </a:p>
-        </p:txBody>
-      </p:sp>
-      <p:sp>
-        <p:nvSpPr>
-          <p:cNvPr id="14" name="Freeform 25">
-            <a:extLst>
-              <a:ext uri="{FF2B5EF4-FFF2-40B4-BE49-F238E27FC236}">
-                <a16:creationId xmlns:a16="http://schemas.microsoft.com/office/drawing/2014/main" id="{D73EBEE6-2E8A-47F3-ADCA-5C0A95C36366}"/>
-              </a:ext>
-              <a:ext uri="{C183D7F6-B498-43B3-948B-1728B52AA6E4}">
-                <adec:decorative xmlns:adec="http://schemas.microsoft.com/office/drawing/2017/decorative" val="1"/>
-              </a:ext>
-            </a:extLst>
-          </p:cNvPr>
-          <p:cNvSpPr>
-            <a:spLocks noGrp="1" noRot="1" noChangeAspect="1" noMove="1" noResize="1" noEditPoints="1" noAdjustHandles="1" noChangeArrowheads="1" noChangeShapeType="1" noTextEdit="1"/>
-          </p:cNvSpPr>
-          <p:nvPr>
-            <p:extLst>
-              <p:ext uri="{386F3935-93C4-4BCD-93E2-E3B085C9AB24}">
-                <p16:designElem xmlns:p16="http://schemas.microsoft.com/office/powerpoint/2015/main" val="1"/>
-              </p:ext>
-            </p:extLst>
-          </p:nvPr>
-        </p:nvSpPr>
-        <p:spPr>
-          <a:xfrm>
-            <a:off x="0" y="0"/>
-            <a:ext cx="8719579" cy="456877"/>
-          </a:xfrm>
-          <a:custGeom>
-            <a:avLst/>
-            <a:gdLst/>
-            <a:ahLst/>
-            <a:cxnLst/>
-            <a:rect l="l" t="t" r="r" b="b"/>
-            <a:pathLst>
-              <a:path w="8719579" h="456877">
-                <a:moveTo>
-                  <a:pt x="0" y="0"/>
-                </a:moveTo>
-                <a:lnTo>
-                  <a:pt x="8719579" y="0"/>
-                </a:lnTo>
-                <a:lnTo>
-                  <a:pt x="0" y="456877"/>
-                </a:lnTo>
-                <a:lnTo>
-                  <a:pt x="0" y="0"/>
-                </a:lnTo>
-                <a:close/>
-              </a:path>
-            </a:pathLst>
-          </a:custGeom>
-          <a:gradFill flip="none" rotWithShape="1">
-            <a:gsLst>
-              <a:gs pos="34000">
-                <a:schemeClr val="accent1"/>
-              </a:gs>
-              <a:gs pos="100000">
-                <a:schemeClr val="accent1">
-                  <a:lumMod val="50000"/>
-                </a:schemeClr>
-              </a:gs>
-            </a:gsLst>
-            <a:path path="circle">
-              <a:fillToRect l="50000" t="50000" r="50000" b="50000"/>
-            </a:path>
-            <a:tileRect/>
-          </a:gradFill>
-          <a:ln>
-            <a:noFill/>
-          </a:ln>
-        </p:spPr>
-        <p:style>
-          <a:lnRef idx="1">
-            <a:schemeClr val="accent1"/>
-          </a:lnRef>
-          <a:fillRef idx="3">
-            <a:schemeClr val="accent1"/>
-          </a:fillRef>
-          <a:effectRef idx="2">
-            <a:schemeClr val="accent1"/>
-          </a:effectRef>
-          <a:fontRef idx="minor">
-            <a:schemeClr val="lt1"/>
-          </a:fontRef>
-        </p:style>
-        <p:txBody>
-          <a:bodyPr/>
-          <a:lstStyle/>
-          <a:p>
-            <a:endParaRPr lang="en-CA"/>
-          </a:p>
-        </p:txBody>
-      </p:sp>
-      <p:sp>
-        <p:nvSpPr>
-          <p:cNvPr id="16" name="Freeform 14">
-            <a:extLst>
-              <a:ext uri="{FF2B5EF4-FFF2-40B4-BE49-F238E27FC236}">
-                <a16:creationId xmlns:a16="http://schemas.microsoft.com/office/drawing/2014/main" id="{47525714-3E1C-46F0-A17D-D3BE3D221F0D}"/>
-              </a:ext>
-              <a:ext uri="{C183D7F6-B498-43B3-948B-1728B52AA6E4}">
-                <adec:decorative xmlns:adec="http://schemas.microsoft.com/office/drawing/2017/decorative" val="1"/>
-              </a:ext>
-            </a:extLst>
-          </p:cNvPr>
-          <p:cNvSpPr>
-            <a:spLocks noGrp="1" noRot="1" noChangeAspect="1" noMove="1" noResize="1" noEditPoints="1" noAdjustHandles="1" noChangeArrowheads="1" noChangeShapeType="1" noTextEdit="1"/>
-          </p:cNvSpPr>
-          <p:nvPr>
-            <p:extLst>
-              <p:ext uri="{386F3935-93C4-4BCD-93E2-E3B085C9AB24}">
-                <p16:designElem xmlns:p16="http://schemas.microsoft.com/office/powerpoint/2015/main" val="1"/>
-              </p:ext>
-            </p:extLst>
-          </p:nvPr>
-        </p:nvSpPr>
-        <p:spPr>
-          <a:xfrm rot="21420000">
-            <a:off x="-161800" y="293317"/>
-            <a:ext cx="11367116" cy="5751804"/>
-          </a:xfrm>
-          <a:custGeom>
-            <a:avLst/>
-            <a:gdLst/>
-            <a:ahLst/>
-            <a:cxnLst/>
-            <a:rect l="l" t="t" r="r" b="b"/>
-            <a:pathLst>
-              <a:path w="11367116" h="5751804">
-                <a:moveTo>
-                  <a:pt x="11346705" y="0"/>
-                </a:moveTo>
-                <a:cubicBezTo>
-                  <a:pt x="11353509" y="1915114"/>
-                  <a:pt x="11360312" y="3830229"/>
-                  <a:pt x="11367116" y="5745343"/>
-                </a:cubicBezTo>
-                <a:lnTo>
-                  <a:pt x="0" y="5751804"/>
-                </a:lnTo>
-              </a:path>
-            </a:pathLst>
-          </a:custGeom>
-          <a:ln w="82550">
-            <a:solidFill>
-              <a:schemeClr val="tx1">
-                <a:lumMod val="50000"/>
-                <a:lumOff val="50000"/>
-              </a:schemeClr>
-            </a:solidFill>
-            <a:miter lim="800000"/>
-          </a:ln>
-        </p:spPr>
-        <p:style>
-          <a:lnRef idx="2">
-            <a:schemeClr val="accent1"/>
-          </a:lnRef>
-          <a:fillRef idx="0">
-            <a:schemeClr val="accent1"/>
-          </a:fillRef>
-          <a:effectRef idx="1">
-            <a:schemeClr val="accent1"/>
-          </a:effectRef>
-          <a:fontRef idx="minor">
-            <a:schemeClr val="tx1"/>
-          </a:fontRef>
-        </p:style>
-        <p:txBody>
-          <a:bodyPr/>
-          <a:lstStyle/>
-          <a:p>
-            <a:endParaRPr lang="en-CA"/>
-          </a:p>
-        </p:txBody>
-      </p:sp>
-      <p:sp>
-        <p:nvSpPr>
-          <p:cNvPr id="18" name="5-Point Star 24">
-            <a:extLst>
-              <a:ext uri="{FF2B5EF4-FFF2-40B4-BE49-F238E27FC236}">
-                <a16:creationId xmlns:a16="http://schemas.microsoft.com/office/drawing/2014/main" id="{B178D758-A5E1-416F-9966-F71730470AE4}"/>
-              </a:ext>
-              <a:ext uri="{C183D7F6-B498-43B3-948B-1728B52AA6E4}">
-                <adec:decorative xmlns:adec="http://schemas.microsoft.com/office/drawing/2017/decorative" val="1"/>
-              </a:ext>
-            </a:extLst>
-          </p:cNvPr>
-          <p:cNvSpPr>
-            <a:spLocks noGrp="1" noRot="1" noChangeAspect="1" noMove="1" noResize="1" noEditPoints="1" noAdjustHandles="1" noChangeArrowheads="1" noChangeShapeType="1" noTextEdit="1"/>
-          </p:cNvSpPr>
-          <p:nvPr>
-            <p:extLst>
-              <p:ext uri="{386F3935-93C4-4BCD-93E2-E3B085C9AB24}">
-                <p16:designElem xmlns:p16="http://schemas.microsoft.com/office/powerpoint/2015/main" val="1"/>
-              </p:ext>
-            </p:extLst>
-          </p:nvPr>
-        </p:nvSpPr>
-        <p:spPr>
-          <a:xfrm rot="21420000">
-            <a:off x="4221385" y="5111356"/>
-            <a:ext cx="515386" cy="515386"/>
-          </a:xfrm>
-          <a:prstGeom prst="star5">
-            <a:avLst>
-              <a:gd name="adj" fmla="val 26693"/>
-              <a:gd name="hf" fmla="val 105146"/>
-              <a:gd name="vf" fmla="val 110557"/>
-            </a:avLst>
-          </a:prstGeom>
-          <a:solidFill>
-            <a:schemeClr val="tx1">
-              <a:alpha val="40000"/>
-            </a:schemeClr>
-          </a:solidFill>
-          <a:ln>
-            <a:noFill/>
-          </a:ln>
-        </p:spPr>
-        <p:style>
-          <a:lnRef idx="1">
-            <a:schemeClr val="accent1"/>
-          </a:lnRef>
-          <a:fillRef idx="3">
-            <a:schemeClr val="accent1"/>
-          </a:fillRef>
-          <a:effectRef idx="2">
-            <a:schemeClr val="accent1"/>
-          </a:effectRef>
-          <a:fontRef idx="minor">
-            <a:schemeClr val="lt1"/>
-          </a:fontRef>
-        </p:style>
-        <p:txBody>
-          <a:bodyPr/>
-          <a:lstStyle/>
-          <a:p>
-            <a:endParaRPr lang="en-CA"/>
-          </a:p>
-        </p:txBody>
-      </p:sp>
-      <p:pic>
-        <p:nvPicPr>
-          <p:cNvPr id="20" name="Picture 19">
-            <a:extLst>
-              <a:ext uri="{FF2B5EF4-FFF2-40B4-BE49-F238E27FC236}">
-                <a16:creationId xmlns:a16="http://schemas.microsoft.com/office/drawing/2014/main" id="{BB28D430-56EA-45B9-8632-927BEBF02975}"/>
-              </a:ext>
-              <a:ext uri="{C183D7F6-B498-43B3-948B-1728B52AA6E4}">
-                <adec:decorative xmlns:adec="http://schemas.microsoft.com/office/drawing/2017/decorative" val="1"/>
-              </a:ext>
-            </a:extLst>
-          </p:cNvPr>
-          <p:cNvPicPr>
-            <a:picLocks noGrp="1" noRot="1" noChangeAspect="1" noMove="1" noResize="1" noEditPoints="1" noAdjustHandles="1" noChangeArrowheads="1" noChangeShapeType="1" noCrop="1"/>
-          </p:cNvPicPr>
-          <p:nvPr>
-            <p:extLst>
-              <p:ext uri="{386F3935-93C4-4BCD-93E2-E3B085C9AB24}">
-                <p16:designElem xmlns:p16="http://schemas.microsoft.com/office/powerpoint/2015/main" val="1"/>
-              </p:ext>
-            </p:extLst>
-          </p:nvPr>
-        </p:nvPicPr>
-        <p:blipFill>
-          <a:blip r:embed="rId3">
-            <a:extLst>
-              <a:ext uri="{28A0092B-C50C-407E-A947-70E740481C1C}">
-                <a14:useLocalDpi xmlns:a14="http://schemas.microsoft.com/office/drawing/2010/main" val="0"/>
-              </a:ext>
-            </a:extLst>
-          </a:blip>
-          <a:stretch>
-            <a:fillRect/>
-          </a:stretch>
-        </p:blipFill>
-        <p:spPr>
-          <a:xfrm>
-            <a:off x="0" y="0"/>
-            <a:ext cx="12192000" cy="6858000"/>
-          </a:xfrm>
-          <a:prstGeom prst="rect">
-            <a:avLst/>
-          </a:prstGeom>
-        </p:spPr>
-      </p:pic>
-      <p:sp useBgFill="1">
-        <p:nvSpPr>
-          <p:cNvPr id="22" name="Freeform: Shape 21">
-            <a:extLst>
-              <a:ext uri="{FF2B5EF4-FFF2-40B4-BE49-F238E27FC236}">
-                <a16:creationId xmlns:a16="http://schemas.microsoft.com/office/drawing/2014/main" id="{A601F395-3079-4179-84BA-6654D9F8258F}"/>
-              </a:ext>
-              <a:ext uri="{C183D7F6-B498-43B3-948B-1728B52AA6E4}">
-                <adec:decorative xmlns:adec="http://schemas.microsoft.com/office/drawing/2017/decorative" val="1"/>
-              </a:ext>
-            </a:extLst>
-          </p:cNvPr>
-          <p:cNvSpPr>
-            <a:spLocks noGrp="1" noRot="1" noChangeAspect="1" noMove="1" noResize="1" noEditPoints="1" noAdjustHandles="1" noChangeArrowheads="1" noChangeShapeType="1" noTextEdit="1"/>
-          </p:cNvSpPr>
-          <p:nvPr>
-            <p:extLst>
-              <p:ext uri="{386F3935-93C4-4BCD-93E2-E3B085C9AB24}">
-                <p16:designElem xmlns:p16="http://schemas.microsoft.com/office/powerpoint/2015/main" val="1"/>
-              </p:ext>
-            </p:extLst>
-          </p:nvPr>
-        </p:nvSpPr>
-        <p:spPr>
-          <a:xfrm>
-            <a:off x="643466" y="643467"/>
-            <a:ext cx="10905067" cy="5571066"/>
-          </a:xfrm>
-          <a:custGeom>
-            <a:avLst/>
-            <a:gdLst>
-              <a:gd name="connsiteX0" fmla="*/ 0 w 8130198"/>
-              <a:gd name="connsiteY0" fmla="*/ 0 h 6857999"/>
-              <a:gd name="connsiteX1" fmla="*/ 7241014 w 8130198"/>
-              <a:gd name="connsiteY1" fmla="*/ 0 h 6857999"/>
-              <a:gd name="connsiteX2" fmla="*/ 8130198 w 8130198"/>
-              <a:gd name="connsiteY2" fmla="*/ 0 h 6857999"/>
-              <a:gd name="connsiteX3" fmla="*/ 8130198 w 8130198"/>
-              <a:gd name="connsiteY3" fmla="*/ 6857999 h 6857999"/>
-              <a:gd name="connsiteX4" fmla="*/ 0 w 8130198"/>
-              <a:gd name="connsiteY4" fmla="*/ 6857999 h 6857999"/>
-              <a:gd name="connsiteX5" fmla="*/ 0 w 8130198"/>
-              <a:gd name="connsiteY5" fmla="*/ 6375361 h 6857999"/>
-            </a:gdLst>
-            <a:ahLst/>
-            <a:cxnLst>
-              <a:cxn ang="0">
-                <a:pos x="connsiteX0" y="connsiteY0"/>
-              </a:cxn>
-              <a:cxn ang="0">
-                <a:pos x="connsiteX1" y="connsiteY1"/>
-              </a:cxn>
-              <a:cxn ang="0">
-                <a:pos x="connsiteX2" y="connsiteY2"/>
-              </a:cxn>
-              <a:cxn ang="0">
-                <a:pos x="connsiteX3" y="connsiteY3"/>
-              </a:cxn>
-              <a:cxn ang="0">
-                <a:pos x="connsiteX4" y="connsiteY4"/>
-              </a:cxn>
-              <a:cxn ang="0">
-                <a:pos x="connsiteX5" y="connsiteY5"/>
-              </a:cxn>
-            </a:cxnLst>
-            <a:rect l="l" t="t" r="r" b="b"/>
-            <a:pathLst>
-              <a:path w="8130198" h="6857999">
-                <a:moveTo>
-                  <a:pt x="0" y="0"/>
-                </a:moveTo>
-                <a:lnTo>
-                  <a:pt x="7241014" y="0"/>
-                </a:lnTo>
-                <a:lnTo>
-                  <a:pt x="8130198" y="0"/>
-                </a:lnTo>
-                <a:lnTo>
-                  <a:pt x="8130198" y="6857999"/>
-                </a:lnTo>
-                <a:lnTo>
-                  <a:pt x="0" y="6857999"/>
-                </a:lnTo>
-                <a:lnTo>
-                  <a:pt x="0" y="6375361"/>
-                </a:lnTo>
-                <a:close/>
-              </a:path>
-            </a:pathLst>
-          </a:custGeom>
-          <a:ln w="50800" cap="sq">
-            <a:noFill/>
-            <a:miter lim="800000"/>
-          </a:ln>
-          <a:effectLst>
-            <a:outerShdw blurRad="101600" dist="152400" dir="4380000" algn="t" rotWithShape="0">
-              <a:prstClr val="black">
-                <a:alpha val="43000"/>
-              </a:prstClr>
-            </a:outerShdw>
-          </a:effectLst>
-        </p:spPr>
-        <p:style>
-          <a:lnRef idx="1">
-            <a:schemeClr val="accent1"/>
-          </a:lnRef>
-          <a:fillRef idx="3">
-            <a:schemeClr val="accent1"/>
-          </a:fillRef>
-          <a:effectRef idx="2">
-            <a:schemeClr val="accent1"/>
-          </a:effectRef>
-          <a:fontRef idx="minor">
-            <a:schemeClr val="lt1"/>
-          </a:fontRef>
-        </p:style>
-        <p:txBody>
-          <a:bodyPr/>
-          <a:lstStyle/>
-          <a:p>
-            <a:endParaRPr lang="en-CA"/>
-          </a:p>
-        </p:txBody>
-      </p:sp>
-      <p:sp>
-        <p:nvSpPr>
-          <p:cNvPr id="24" name="5-Point Star 24">
-            <a:extLst>
-              <a:ext uri="{FF2B5EF4-FFF2-40B4-BE49-F238E27FC236}">
-                <a16:creationId xmlns:a16="http://schemas.microsoft.com/office/drawing/2014/main" id="{B15DEAD7-09E6-42D9-9D03-43E6EA3E0564}"/>
-              </a:ext>
-              <a:ext uri="{C183D7F6-B498-43B3-948B-1728B52AA6E4}">
-                <adec:decorative xmlns:adec="http://schemas.microsoft.com/office/drawing/2017/decorative" val="1"/>
-              </a:ext>
-            </a:extLst>
-          </p:cNvPr>
-          <p:cNvSpPr>
-            <a:spLocks noGrp="1" noRot="1" noChangeAspect="1" noMove="1" noResize="1" noEditPoints="1" noAdjustHandles="1" noChangeArrowheads="1" noChangeShapeType="1" noTextEdit="1"/>
-          </p:cNvSpPr>
-          <p:nvPr>
-            <p:extLst>
-              <p:ext uri="{386F3935-93C4-4BCD-93E2-E3B085C9AB24}">
-                <p16:designElem xmlns:p16="http://schemas.microsoft.com/office/powerpoint/2015/main" val="1"/>
-              </p:ext>
-            </p:extLst>
-          </p:nvPr>
-        </p:nvSpPr>
-        <p:spPr>
-          <a:xfrm>
-            <a:off x="5969678" y="3748085"/>
-            <a:ext cx="252644" cy="252644"/>
-          </a:xfrm>
-          <a:prstGeom prst="star5">
-            <a:avLst>
-              <a:gd name="adj" fmla="val 26693"/>
-              <a:gd name="hf" fmla="val 105146"/>
-              <a:gd name="vf" fmla="val 110557"/>
-            </a:avLst>
-          </a:prstGeom>
-          <a:solidFill>
-            <a:schemeClr val="tx1">
-              <a:alpha val="40000"/>
-            </a:schemeClr>
-          </a:solidFill>
-          <a:ln>
-            <a:noFill/>
-          </a:ln>
-        </p:spPr>
-        <p:style>
-          <a:lnRef idx="1">
-            <a:schemeClr val="accent1"/>
-          </a:lnRef>
-          <a:fillRef idx="3">
-            <a:schemeClr val="accent1"/>
-          </a:fillRef>
-          <a:effectRef idx="2">
-            <a:schemeClr val="accent1"/>
-          </a:effectRef>
-          <a:fontRef idx="minor">
-            <a:schemeClr val="lt1"/>
-          </a:fontRef>
-        </p:style>
-        <p:txBody>
-          <a:bodyPr/>
-          <a:lstStyle/>
-          <a:p>
-            <a:endParaRPr lang="en-CA"/>
-          </a:p>
-        </p:txBody>
-      </p:sp>
       <p:sp>
         <p:nvSpPr>
           <p:cNvPr id="2" name="Title 1">
@@ -10386,7 +7732,7 @@
 <file path=ppt/theme/theme1.xml><?xml version="1.0" encoding="utf-8"?>
 <a:theme xmlns:a="http://schemas.openxmlformats.org/drawingml/2006/main" name="Main Event">
   <a:themeElements>
-    <a:clrScheme name="Green">
+    <a:clrScheme name="Green Yellow">
       <a:dk1>
         <a:sysClr val="windowText" lastClr="000000"/>
       </a:dk1>
@@ -10397,31 +7743,31 @@
         <a:srgbClr val="455F51"/>
       </a:dk2>
       <a:lt2>
-        <a:srgbClr val="E3DED1"/>
+        <a:srgbClr val="E2DFCC"/>
       </a:lt2>
       <a:accent1>
-        <a:srgbClr val="549E39"/>
+        <a:srgbClr val="99CB38"/>
       </a:accent1>
       <a:accent2>
-        <a:srgbClr val="8AB833"/>
+        <a:srgbClr val="63A537"/>
       </a:accent2>
       <a:accent3>
-        <a:srgbClr val="C0CF3A"/>
+        <a:srgbClr val="37A76F"/>
       </a:accent3>
       <a:accent4>
-        <a:srgbClr val="029676"/>
+        <a:srgbClr val="44C1A3"/>
       </a:accent4>
       <a:accent5>
-        <a:srgbClr val="4AB5C4"/>
+        <a:srgbClr val="4EB3CF"/>
       </a:accent5>
       <a:accent6>
-        <a:srgbClr val="0989B1"/>
+        <a:srgbClr val="51C3F9"/>
       </a:accent6>
       <a:hlink>
-        <a:srgbClr val="6B9F25"/>
+        <a:srgbClr val="EE7B08"/>
       </a:hlink>
       <a:folHlink>
-        <a:srgbClr val="BA6906"/>
+        <a:srgbClr val="977B2D"/>
       </a:folHlink>
     </a:clrScheme>
     <a:fontScheme name="Main Event">
@@ -10604,7 +7950,7 @@
   <a:extraClrSchemeLst/>
   <a:extLst>
     <a:ext uri="{05A4C25C-085E-4340-85A3-A5531E510DB2}">
-      <thm15:themeFamily xmlns:thm15="http://schemas.microsoft.com/office/thememl/2012/main" name="Main Event" id="{AC372BB4-D83D-411E-B849-B641926BA760}" vid="{F1EFBDE3-1A95-4E3D-81AD-1F53D65BEA01}"/>
+      <thm15:themeFamily xmlns:thm15="http://schemas.microsoft.com/office/thememl/2012/main" name="Main Event" id="{AC372BB4-D83D-411E-B849-B641926BA760}" vid="{CF823853-53CC-4249-AEDB-2EA9F718B2D2}"/>
     </a:ext>
   </a:extLst>
 </a:theme>

--- a/system/Presentation.pptx
+++ b/system/Presentation.pptx
@@ -228,6 +228,13 @@
             <a:schemeClr val="lt1"/>
           </a:fontRef>
         </p:style>
+        <p:txBody>
+          <a:bodyPr/>
+          <a:lstStyle/>
+          <a:p>
+            <a:endParaRPr lang="en-CA"/>
+          </a:p>
+        </p:txBody>
       </p:sp>
       <p:sp>
         <p:nvSpPr>
@@ -301,6 +308,13 @@
             <a:schemeClr val="lt1"/>
           </a:fontRef>
         </p:style>
+        <p:txBody>
+          <a:bodyPr/>
+          <a:lstStyle/>
+          <a:p>
+            <a:endParaRPr lang="en-CA"/>
+          </a:p>
+        </p:txBody>
       </p:sp>
       <p:sp>
         <p:nvSpPr>
@@ -371,6 +385,13 @@
             <a:schemeClr val="lt1"/>
           </a:fontRef>
         </p:style>
+        <p:txBody>
+          <a:bodyPr/>
+          <a:lstStyle/>
+          <a:p>
+            <a:endParaRPr lang="en-CA"/>
+          </a:p>
+        </p:txBody>
       </p:sp>
       <p:sp>
         <p:nvSpPr>
@@ -429,6 +450,13 @@
             <a:schemeClr val="tx1"/>
           </a:fontRef>
         </p:style>
+        <p:txBody>
+          <a:bodyPr/>
+          <a:lstStyle/>
+          <a:p>
+            <a:endParaRPr lang="en-CA"/>
+          </a:p>
+        </p:txBody>
       </p:sp>
       <p:sp>
         <p:nvSpPr>
@@ -683,6 +711,13 @@
             <a:schemeClr val="lt1"/>
           </a:fontRef>
         </p:style>
+        <p:txBody>
+          <a:bodyPr/>
+          <a:lstStyle/>
+          <a:p>
+            <a:endParaRPr lang="en-CA"/>
+          </a:p>
+        </p:txBody>
       </p:sp>
     </p:spTree>
     <p:extLst>
@@ -5646,6 +5681,13 @@
               <a:schemeClr val="lt1"/>
             </a:fontRef>
           </p:style>
+          <p:txBody>
+            <a:bodyPr/>
+            <a:lstStyle/>
+            <a:p>
+              <a:endParaRPr lang="en-CA"/>
+            </a:p>
+          </p:txBody>
         </p:sp>
         <p:sp>
           <p:nvSpPr>
@@ -5702,6 +5744,13 @@
               <a:schemeClr val="tx1"/>
             </a:fontRef>
           </p:style>
+          <p:txBody>
+            <a:bodyPr/>
+            <a:lstStyle/>
+            <a:p>
+              <a:endParaRPr lang="en-CA"/>
+            </a:p>
+          </p:txBody>
         </p:sp>
         <p:sp>
           <p:nvSpPr>
@@ -5751,6 +5800,13 @@
               <a:schemeClr val="lt1"/>
             </a:fontRef>
           </p:style>
+          <p:txBody>
+            <a:bodyPr/>
+            <a:lstStyle/>
+            <a:p>
+              <a:endParaRPr lang="en-CA"/>
+            </a:p>
+          </p:txBody>
         </p:sp>
       </p:grpSp>
       <p:sp>
@@ -6574,9 +6630,10 @@
           <a:p>
             <a:pPr algn="ctr"/>
             <a:r>
-              <a:rPr lang="en-CA" dirty="0"/>
-              <a:t>Anthony Macia</a:t>
-            </a:r>
+              <a:rPr lang="en-CA"/>
+              <a:t>Anthony Mancia</a:t>
+            </a:r>
+            <a:endParaRPr lang="en-CA" dirty="0"/>
           </a:p>
         </p:txBody>
       </p:sp>
